--- a/static/images/aqnwb_0.4_release_banner.pptx
+++ b/static/images/aqnwb_0.4_release_banner.pptx
@@ -2,12 +2,12 @@
 <file path=ppt/presentation.xml><?xml version="1.0" encoding="utf-8"?>
 <p:presentation xmlns:a="http://schemas.openxmlformats.org/drawingml/2006/main" xmlns:r="http://schemas.openxmlformats.org/officeDocument/2006/relationships" xmlns:p="http://schemas.openxmlformats.org/presentationml/2006/main" saveSubsetFonts="1" autoCompressPictures="0">
   <p:sldMasterIdLst>
-    <p:sldMasterId id="2147483672" r:id="rId1"/>
+    <p:sldMasterId id="2147483684" r:id="rId1"/>
   </p:sldMasterIdLst>
   <p:sldIdLst>
     <p:sldId id="256" r:id="rId2"/>
   </p:sldIdLst>
-  <p:sldSz cx="8229600" cy="3749675"/>
+  <p:sldSz cx="8686800" cy="3749675"/>
   <p:notesSz cx="6858000" cy="9144000"/>
   <p:defaultTextStyle>
     <a:defPPr>
@@ -112,7 +112,7 @@
             <a:srgbClr val="A4A3A4"/>
           </p15:clr>
         </p15:guide>
-        <p15:guide id="2" pos="2592" userDrawn="1">
+        <p15:guide id="2" pos="2736" userDrawn="1">
           <p15:clr>
             <a:srgbClr val="A4A3A4"/>
           </p15:clr>
@@ -152,8 +152,8 @@
         </p:nvSpPr>
         <p:spPr>
           <a:xfrm>
-            <a:off x="1028700" y="613663"/>
-            <a:ext cx="6172200" cy="1305442"/>
+            <a:off x="1085850" y="613663"/>
+            <a:ext cx="6515100" cy="1305442"/>
           </a:xfrm>
         </p:spPr>
         <p:txBody>
@@ -184,8 +184,8 @@
         </p:nvSpPr>
         <p:spPr>
           <a:xfrm>
-            <a:off x="1028700" y="1969448"/>
-            <a:ext cx="6172200" cy="905303"/>
+            <a:off x="1085850" y="1969448"/>
+            <a:ext cx="6515100" cy="905303"/>
           </a:xfrm>
         </p:spPr>
         <p:txBody>
@@ -305,7 +305,7 @@
     </p:spTree>
     <p:extLst>
       <p:ext uri="{BB962C8B-B14F-4D97-AF65-F5344CB8AC3E}">
-        <p14:creationId xmlns:p14="http://schemas.microsoft.com/office/powerpoint/2010/main" val="3518465504"/>
+        <p14:creationId xmlns:p14="http://schemas.microsoft.com/office/powerpoint/2010/main" val="3338460708"/>
       </p:ext>
     </p:extLst>
   </p:cSld>
@@ -475,7 +475,7 @@
     </p:spTree>
     <p:extLst>
       <p:ext uri="{BB962C8B-B14F-4D97-AF65-F5344CB8AC3E}">
-        <p14:creationId xmlns:p14="http://schemas.microsoft.com/office/powerpoint/2010/main" val="798239537"/>
+        <p14:creationId xmlns:p14="http://schemas.microsoft.com/office/powerpoint/2010/main" val="629593741"/>
       </p:ext>
     </p:extLst>
   </p:cSld>
@@ -514,8 +514,8 @@
         </p:nvSpPr>
         <p:spPr>
           <a:xfrm>
-            <a:off x="5889307" y="199636"/>
-            <a:ext cx="1774508" cy="3177676"/>
+            <a:off x="6216491" y="199636"/>
+            <a:ext cx="1873091" cy="3177676"/>
           </a:xfrm>
         </p:spPr>
         <p:txBody>
@@ -542,8 +542,8 @@
         </p:nvSpPr>
         <p:spPr>
           <a:xfrm>
-            <a:off x="565785" y="199636"/>
-            <a:ext cx="5220653" cy="3177676"/>
+            <a:off x="597217" y="199636"/>
+            <a:ext cx="5510689" cy="3177676"/>
           </a:xfrm>
         </p:spPr>
         <p:txBody>
@@ -655,7 +655,7 @@
     </p:spTree>
     <p:extLst>
       <p:ext uri="{BB962C8B-B14F-4D97-AF65-F5344CB8AC3E}">
-        <p14:creationId xmlns:p14="http://schemas.microsoft.com/office/powerpoint/2010/main" val="2928380377"/>
+        <p14:creationId xmlns:p14="http://schemas.microsoft.com/office/powerpoint/2010/main" val="1410466518"/>
       </p:ext>
     </p:extLst>
   </p:cSld>
@@ -825,7 +825,7 @@
     </p:spTree>
     <p:extLst>
       <p:ext uri="{BB962C8B-B14F-4D97-AF65-F5344CB8AC3E}">
-        <p14:creationId xmlns:p14="http://schemas.microsoft.com/office/powerpoint/2010/main" val="415693294"/>
+        <p14:creationId xmlns:p14="http://schemas.microsoft.com/office/powerpoint/2010/main" val="469727130"/>
       </p:ext>
     </p:extLst>
   </p:cSld>
@@ -864,8 +864,8 @@
         </p:nvSpPr>
         <p:spPr>
           <a:xfrm>
-            <a:off x="561499" y="934816"/>
-            <a:ext cx="7098030" cy="1559760"/>
+            <a:off x="592693" y="934816"/>
+            <a:ext cx="7492365" cy="1559760"/>
           </a:xfrm>
         </p:spPr>
         <p:txBody>
@@ -896,8 +896,8 @@
         </p:nvSpPr>
         <p:spPr>
           <a:xfrm>
-            <a:off x="561499" y="2509332"/>
-            <a:ext cx="7098030" cy="820241"/>
+            <a:off x="592693" y="2509332"/>
+            <a:ext cx="7492365" cy="820241"/>
           </a:xfrm>
         </p:spPr>
         <p:txBody>
@@ -1071,7 +1071,7 @@
     </p:spTree>
     <p:extLst>
       <p:ext uri="{BB962C8B-B14F-4D97-AF65-F5344CB8AC3E}">
-        <p14:creationId xmlns:p14="http://schemas.microsoft.com/office/powerpoint/2010/main" val="2482695185"/>
+        <p14:creationId xmlns:p14="http://schemas.microsoft.com/office/powerpoint/2010/main" val="3964036468"/>
       </p:ext>
     </p:extLst>
   </p:cSld>
@@ -1133,8 +1133,8 @@
         </p:nvSpPr>
         <p:spPr>
           <a:xfrm>
-            <a:off x="565785" y="998178"/>
-            <a:ext cx="3497580" cy="2379134"/>
+            <a:off x="597218" y="998178"/>
+            <a:ext cx="3691890" cy="2379134"/>
           </a:xfrm>
         </p:spPr>
         <p:txBody>
@@ -1190,8 +1190,8 @@
         </p:nvSpPr>
         <p:spPr>
           <a:xfrm>
-            <a:off x="4166235" y="998178"/>
-            <a:ext cx="3497580" cy="2379134"/>
+            <a:off x="4397693" y="998178"/>
+            <a:ext cx="3691890" cy="2379134"/>
           </a:xfrm>
         </p:spPr>
         <p:txBody>
@@ -1303,7 +1303,7 @@
     </p:spTree>
     <p:extLst>
       <p:ext uri="{BB962C8B-B14F-4D97-AF65-F5344CB8AC3E}">
-        <p14:creationId xmlns:p14="http://schemas.microsoft.com/office/powerpoint/2010/main" val="2313052097"/>
+        <p14:creationId xmlns:p14="http://schemas.microsoft.com/office/powerpoint/2010/main" val="3735417210"/>
       </p:ext>
     </p:extLst>
   </p:cSld>
@@ -1342,8 +1342,8 @@
         </p:nvSpPr>
         <p:spPr>
           <a:xfrm>
-            <a:off x="566857" y="199636"/>
-            <a:ext cx="7098030" cy="724764"/>
+            <a:off x="598349" y="199636"/>
+            <a:ext cx="7492365" cy="724764"/>
           </a:xfrm>
         </p:spPr>
         <p:txBody>
@@ -1370,8 +1370,8 @@
         </p:nvSpPr>
         <p:spPr>
           <a:xfrm>
-            <a:off x="566857" y="919191"/>
-            <a:ext cx="3481506" cy="450482"/>
+            <a:off x="598349" y="919191"/>
+            <a:ext cx="3674923" cy="450482"/>
           </a:xfrm>
         </p:spPr>
         <p:txBody>
@@ -1435,8 +1435,8 @@
         </p:nvSpPr>
         <p:spPr>
           <a:xfrm>
-            <a:off x="566857" y="1369673"/>
-            <a:ext cx="3481506" cy="2014583"/>
+            <a:off x="598349" y="1369673"/>
+            <a:ext cx="3674923" cy="2014583"/>
           </a:xfrm>
         </p:spPr>
         <p:txBody>
@@ -1492,8 +1492,8 @@
         </p:nvSpPr>
         <p:spPr>
           <a:xfrm>
-            <a:off x="4166235" y="919191"/>
-            <a:ext cx="3498652" cy="450482"/>
+            <a:off x="4397693" y="919191"/>
+            <a:ext cx="3693021" cy="450482"/>
           </a:xfrm>
         </p:spPr>
         <p:txBody>
@@ -1557,8 +1557,8 @@
         </p:nvSpPr>
         <p:spPr>
           <a:xfrm>
-            <a:off x="4166235" y="1369673"/>
-            <a:ext cx="3498652" cy="2014583"/>
+            <a:off x="4397693" y="1369673"/>
+            <a:ext cx="3693021" cy="2014583"/>
           </a:xfrm>
         </p:spPr>
         <p:txBody>
@@ -1670,7 +1670,7 @@
     </p:spTree>
     <p:extLst>
       <p:ext uri="{BB962C8B-B14F-4D97-AF65-F5344CB8AC3E}">
-        <p14:creationId xmlns:p14="http://schemas.microsoft.com/office/powerpoint/2010/main" val="766569173"/>
+        <p14:creationId xmlns:p14="http://schemas.microsoft.com/office/powerpoint/2010/main" val="3494147891"/>
       </p:ext>
     </p:extLst>
   </p:cSld>
@@ -1788,7 +1788,7 @@
     </p:spTree>
     <p:extLst>
       <p:ext uri="{BB962C8B-B14F-4D97-AF65-F5344CB8AC3E}">
-        <p14:creationId xmlns:p14="http://schemas.microsoft.com/office/powerpoint/2010/main" val="2355533594"/>
+        <p14:creationId xmlns:p14="http://schemas.microsoft.com/office/powerpoint/2010/main" val="557797577"/>
       </p:ext>
     </p:extLst>
   </p:cSld>
@@ -1883,7 +1883,7 @@
     </p:spTree>
     <p:extLst>
       <p:ext uri="{BB962C8B-B14F-4D97-AF65-F5344CB8AC3E}">
-        <p14:creationId xmlns:p14="http://schemas.microsoft.com/office/powerpoint/2010/main" val="1900732775"/>
+        <p14:creationId xmlns:p14="http://schemas.microsoft.com/office/powerpoint/2010/main" val="2820646539"/>
       </p:ext>
     </p:extLst>
   </p:cSld>
@@ -1922,8 +1922,8 @@
         </p:nvSpPr>
         <p:spPr>
           <a:xfrm>
-            <a:off x="566857" y="249978"/>
-            <a:ext cx="2654260" cy="874924"/>
+            <a:off x="598349" y="249978"/>
+            <a:ext cx="2801719" cy="874924"/>
           </a:xfrm>
         </p:spPr>
         <p:txBody>
@@ -1954,8 +1954,8 @@
         </p:nvSpPr>
         <p:spPr>
           <a:xfrm>
-            <a:off x="3498652" y="539884"/>
-            <a:ext cx="4166235" cy="2664700"/>
+            <a:off x="3693021" y="539884"/>
+            <a:ext cx="4397693" cy="2664700"/>
           </a:xfrm>
         </p:spPr>
         <p:txBody>
@@ -2039,8 +2039,8 @@
         </p:nvSpPr>
         <p:spPr>
           <a:xfrm>
-            <a:off x="566857" y="1124903"/>
-            <a:ext cx="2654260" cy="2084021"/>
+            <a:off x="598349" y="1124903"/>
+            <a:ext cx="2801719" cy="2084021"/>
           </a:xfrm>
         </p:spPr>
         <p:txBody>
@@ -2160,7 +2160,7 @@
     </p:spTree>
     <p:extLst>
       <p:ext uri="{BB962C8B-B14F-4D97-AF65-F5344CB8AC3E}">
-        <p14:creationId xmlns:p14="http://schemas.microsoft.com/office/powerpoint/2010/main" val="1036945725"/>
+        <p14:creationId xmlns:p14="http://schemas.microsoft.com/office/powerpoint/2010/main" val="1719427097"/>
       </p:ext>
     </p:extLst>
   </p:cSld>
@@ -2199,8 +2199,8 @@
         </p:nvSpPr>
         <p:spPr>
           <a:xfrm>
-            <a:off x="566857" y="249978"/>
-            <a:ext cx="2654260" cy="874924"/>
+            <a:off x="598349" y="249978"/>
+            <a:ext cx="2801719" cy="874924"/>
           </a:xfrm>
         </p:spPr>
         <p:txBody>
@@ -2231,8 +2231,8 @@
         </p:nvSpPr>
         <p:spPr>
           <a:xfrm>
-            <a:off x="3498652" y="539884"/>
-            <a:ext cx="4166235" cy="2664700"/>
+            <a:off x="3693021" y="539884"/>
+            <a:ext cx="4397693" cy="2664700"/>
           </a:xfrm>
         </p:spPr>
         <p:txBody>
@@ -2296,8 +2296,8 @@
         </p:nvSpPr>
         <p:spPr>
           <a:xfrm>
-            <a:off x="566857" y="1124903"/>
-            <a:ext cx="2654260" cy="2084021"/>
+            <a:off x="598349" y="1124903"/>
+            <a:ext cx="2801719" cy="2084021"/>
           </a:xfrm>
         </p:spPr>
         <p:txBody>
@@ -2417,7 +2417,7 @@
     </p:spTree>
     <p:extLst>
       <p:ext uri="{BB962C8B-B14F-4D97-AF65-F5344CB8AC3E}">
-        <p14:creationId xmlns:p14="http://schemas.microsoft.com/office/powerpoint/2010/main" val="3035443742"/>
+        <p14:creationId xmlns:p14="http://schemas.microsoft.com/office/powerpoint/2010/main" val="3225049813"/>
       </p:ext>
     </p:extLst>
   </p:cSld>
@@ -2461,8 +2461,8 @@
         </p:nvSpPr>
         <p:spPr>
           <a:xfrm>
-            <a:off x="565785" y="199636"/>
-            <a:ext cx="7098030" cy="724764"/>
+            <a:off x="597218" y="199636"/>
+            <a:ext cx="7492365" cy="724764"/>
           </a:xfrm>
           <a:prstGeom prst="rect">
             <a:avLst/>
@@ -2494,8 +2494,8 @@
         </p:nvSpPr>
         <p:spPr>
           <a:xfrm>
-            <a:off x="565785" y="998178"/>
-            <a:ext cx="7098030" cy="2379134"/>
+            <a:off x="597218" y="998178"/>
+            <a:ext cx="7492365" cy="2379134"/>
           </a:xfrm>
           <a:prstGeom prst="rect">
             <a:avLst/>
@@ -2556,8 +2556,8 @@
         </p:nvSpPr>
         <p:spPr>
           <a:xfrm>
-            <a:off x="565785" y="3475394"/>
-            <a:ext cx="1851660" cy="199635"/>
+            <a:off x="597218" y="3475394"/>
+            <a:ext cx="1954530" cy="199635"/>
           </a:xfrm>
           <a:prstGeom prst="rect">
             <a:avLst/>
@@ -2597,8 +2597,8 @@
         </p:nvSpPr>
         <p:spPr>
           <a:xfrm>
-            <a:off x="2726055" y="3475394"/>
-            <a:ext cx="2777490" cy="199635"/>
+            <a:off x="2877503" y="3475394"/>
+            <a:ext cx="2931795" cy="199635"/>
           </a:xfrm>
           <a:prstGeom prst="rect">
             <a:avLst/>
@@ -2634,8 +2634,8 @@
         </p:nvSpPr>
         <p:spPr>
           <a:xfrm>
-            <a:off x="5812155" y="3475394"/>
-            <a:ext cx="1851660" cy="199635"/>
+            <a:off x="6135053" y="3475394"/>
+            <a:ext cx="1954530" cy="199635"/>
           </a:xfrm>
           <a:prstGeom prst="rect">
             <a:avLst/>
@@ -2666,23 +2666,23 @@
     </p:spTree>
     <p:extLst>
       <p:ext uri="{BB962C8B-B14F-4D97-AF65-F5344CB8AC3E}">
-        <p14:creationId xmlns:p14="http://schemas.microsoft.com/office/powerpoint/2010/main" val="1563269652"/>
+        <p14:creationId xmlns:p14="http://schemas.microsoft.com/office/powerpoint/2010/main" val="156446874"/>
       </p:ext>
     </p:extLst>
   </p:cSld>
   <p:clrMap bg1="lt1" tx1="dk1" bg2="lt2" tx2="dk2" accent1="accent1" accent2="accent2" accent3="accent3" accent4="accent4" accent5="accent5" accent6="accent6" hlink="hlink" folHlink="folHlink"/>
   <p:sldLayoutIdLst>
-    <p:sldLayoutId id="2147483673" r:id="rId1"/>
-    <p:sldLayoutId id="2147483674" r:id="rId2"/>
-    <p:sldLayoutId id="2147483675" r:id="rId3"/>
-    <p:sldLayoutId id="2147483676" r:id="rId4"/>
-    <p:sldLayoutId id="2147483677" r:id="rId5"/>
-    <p:sldLayoutId id="2147483678" r:id="rId6"/>
-    <p:sldLayoutId id="2147483679" r:id="rId7"/>
-    <p:sldLayoutId id="2147483680" r:id="rId8"/>
-    <p:sldLayoutId id="2147483681" r:id="rId9"/>
-    <p:sldLayoutId id="2147483682" r:id="rId10"/>
-    <p:sldLayoutId id="2147483683" r:id="rId11"/>
+    <p:sldLayoutId id="2147483685" r:id="rId1"/>
+    <p:sldLayoutId id="2147483686" r:id="rId2"/>
+    <p:sldLayoutId id="2147483687" r:id="rId3"/>
+    <p:sldLayoutId id="2147483688" r:id="rId4"/>
+    <p:sldLayoutId id="2147483689" r:id="rId5"/>
+    <p:sldLayoutId id="2147483690" r:id="rId6"/>
+    <p:sldLayoutId id="2147483691" r:id="rId7"/>
+    <p:sldLayoutId id="2147483692" r:id="rId8"/>
+    <p:sldLayoutId id="2147483693" r:id="rId9"/>
+    <p:sldLayoutId id="2147483694" r:id="rId10"/>
+    <p:sldLayoutId id="2147483695" r:id="rId11"/>
   </p:sldLayoutIdLst>
   <p:txStyles>
     <p:titleStyle>
@@ -2986,6 +2986,58 @@
       </p:grpSpPr>
       <p:sp>
         <p:nvSpPr>
+          <p:cNvPr id="46" name="Rectangle 45">
+            <a:extLst>
+              <a:ext uri="{FF2B5EF4-FFF2-40B4-BE49-F238E27FC236}">
+                <a16:creationId xmlns:a16="http://schemas.microsoft.com/office/drawing/2014/main" id="{7CEDA924-AA51-DF1F-E2A9-CD0BFA9E2EE3}"/>
+              </a:ext>
+            </a:extLst>
+          </p:cNvPr>
+          <p:cNvSpPr/>
+          <p:nvPr/>
+        </p:nvSpPr>
+        <p:spPr>
+          <a:xfrm>
+            <a:off x="1" y="0"/>
+            <a:ext cx="8686800" cy="3749675"/>
+          </a:xfrm>
+          <a:prstGeom prst="rect">
+            <a:avLst/>
+          </a:prstGeom>
+          <a:solidFill>
+            <a:schemeClr val="bg1"/>
+          </a:solidFill>
+          <a:ln>
+            <a:noFill/>
+          </a:ln>
+        </p:spPr>
+        <p:style>
+          <a:lnRef idx="2">
+            <a:schemeClr val="accent1">
+              <a:shade val="15000"/>
+            </a:schemeClr>
+          </a:lnRef>
+          <a:fillRef idx="1">
+            <a:schemeClr val="accent1"/>
+          </a:fillRef>
+          <a:effectRef idx="0">
+            <a:schemeClr val="accent1"/>
+          </a:effectRef>
+          <a:fontRef idx="minor">
+            <a:schemeClr val="lt1"/>
+          </a:fontRef>
+        </p:style>
+        <p:txBody>
+          <a:bodyPr rtlCol="0" anchor="ctr"/>
+          <a:lstStyle/>
+          <a:p>
+            <a:pPr algn="ctr"/>
+            <a:endParaRPr lang="en-US"/>
+          </a:p>
+        </p:txBody>
+      </p:sp>
+      <p:sp>
+        <p:nvSpPr>
           <p:cNvPr id="45" name="Freeform 44">
             <a:extLst>
               <a:ext uri="{FF2B5EF4-FFF2-40B4-BE49-F238E27FC236}">
@@ -2998,8 +3050,8 @@
         </p:nvSpPr>
         <p:spPr>
           <a:xfrm>
-            <a:off x="3999581" y="-1"/>
-            <a:ext cx="4249161" cy="3749675"/>
+            <a:off x="3904941" y="-1"/>
+            <a:ext cx="4765644" cy="3749675"/>
           </a:xfrm>
           <a:custGeom>
             <a:avLst/>
@@ -3357,8 +3409,8 @@
         </p:nvSpPr>
         <p:spPr>
           <a:xfrm>
-            <a:off x="4169389" y="-1"/>
-            <a:ext cx="4066600" cy="3749675"/>
+            <a:off x="4074745" y="-1"/>
+            <a:ext cx="4560892" cy="3749675"/>
           </a:xfrm>
           <a:custGeom>
             <a:avLst/>
@@ -3716,8 +3768,8 @@
         </p:nvSpPr>
         <p:spPr>
           <a:xfrm>
-            <a:off x="4361763" y="-1"/>
-            <a:ext cx="3886979" cy="3749675"/>
+            <a:off x="4267122" y="-1"/>
+            <a:ext cx="4380210" cy="3749675"/>
           </a:xfrm>
           <a:custGeom>
             <a:avLst/>
@@ -4083,7 +4135,7 @@
         </p:blipFill>
         <p:spPr>
           <a:xfrm>
-            <a:off x="386751" y="2020639"/>
+            <a:off x="1293223" y="2046761"/>
             <a:ext cx="2788860" cy="1344271"/>
           </a:xfrm>
           <a:prstGeom prst="rect">
@@ -4105,8 +4157,8 @@
         </p:nvSpPr>
         <p:spPr>
           <a:xfrm>
-            <a:off x="386751" y="384771"/>
-            <a:ext cx="4017446" cy="830997"/>
+            <a:off x="1246265" y="384762"/>
+            <a:ext cx="3057247" cy="646331"/>
           </a:xfrm>
           <a:prstGeom prst="rect">
             <a:avLst/>
@@ -4120,7 +4172,7 @@
           <a:lstStyle/>
           <a:p>
             <a:r>
-              <a:rPr lang="en-US" sz="4800" b="1" dirty="0" err="1">
+              <a:rPr lang="en-US" sz="3600" b="1" dirty="0" err="1">
                 <a:solidFill>
                   <a:srgbClr val="0A4D7C"/>
                 </a:solidFill>
@@ -4130,7 +4182,7 @@
               <a:t>AqNWB</a:t>
             </a:r>
             <a:r>
-              <a:rPr lang="en-US" sz="4800" b="1" dirty="0">
+              <a:rPr lang="en-US" sz="3600" b="1" dirty="0">
                 <a:solidFill>
                   <a:srgbClr val="0A4D7C"/>
                 </a:solidFill>
@@ -4156,7 +4208,7 @@
         </p:nvSpPr>
         <p:spPr>
           <a:xfrm>
-            <a:off x="386751" y="1153959"/>
+            <a:off x="1243187" y="968890"/>
             <a:ext cx="2888932" cy="461665"/>
           </a:xfrm>
           <a:prstGeom prst="rect">
@@ -4197,8 +4249,8 @@
         </p:nvSpPr>
         <p:spPr>
           <a:xfrm>
-            <a:off x="5460170" y="1674129"/>
-            <a:ext cx="2437647" cy="457200"/>
+            <a:off x="5385265" y="1674129"/>
+            <a:ext cx="2215160" cy="457200"/>
           </a:xfrm>
           <a:prstGeom prst="roundRect">
             <a:avLst>
@@ -4244,13 +4296,13 @@
           <a:p>
             <a:pPr algn="ctr"/>
             <a:r>
-              <a:rPr lang="en-US" sz="2000" b="1" dirty="0" err="1">
+              <a:rPr lang="en-US" b="1" dirty="0" err="1">
                 <a:latin typeface="Arial" panose="020B0604020202020204" pitchFamily="34" charset="0"/>
                 <a:cs typeface="Arial" panose="020B0604020202020204" pitchFamily="34" charset="0"/>
               </a:rPr>
               <a:t>EventsTable</a:t>
             </a:r>
-            <a:endParaRPr lang="en-US" sz="1200" b="1" dirty="0">
+            <a:endParaRPr lang="en-US" b="1" dirty="0">
               <a:latin typeface="Arial" panose="020B0604020202020204" pitchFamily="34" charset="0"/>
               <a:cs typeface="Arial" panose="020B0604020202020204" pitchFamily="34" charset="0"/>
             </a:endParaRPr>
@@ -4271,8 +4323,8 @@
         </p:nvSpPr>
         <p:spPr>
           <a:xfrm>
-            <a:off x="4875554" y="456408"/>
-            <a:ext cx="3022263" cy="457200"/>
+            <a:off x="4854871" y="456408"/>
+            <a:ext cx="2745553" cy="457200"/>
           </a:xfrm>
           <a:prstGeom prst="roundRect">
             <a:avLst>
@@ -4318,7 +4370,7 @@
           <a:p>
             <a:pPr algn="ctr"/>
             <a:r>
-              <a:rPr lang="en-US" sz="2000" b="1" dirty="0">
+              <a:rPr lang="en-US" b="1" dirty="0">
                 <a:latin typeface="Arial" panose="020B0604020202020204" pitchFamily="34" charset="0"/>
                 <a:cs typeface="Arial" panose="020B0604020202020204" pitchFamily="34" charset="0"/>
               </a:rPr>
@@ -4341,8 +4393,8 @@
         </p:nvSpPr>
         <p:spPr>
           <a:xfrm>
-            <a:off x="5160364" y="1067659"/>
-            <a:ext cx="2737450" cy="457200"/>
+            <a:off x="5085455" y="1067659"/>
+            <a:ext cx="2514970" cy="457200"/>
           </a:xfrm>
           <a:prstGeom prst="roundRect">
             <a:avLst>
@@ -4388,7 +4440,7 @@
           <a:p>
             <a:pPr algn="ctr"/>
             <a:r>
-              <a:rPr lang="en-US" sz="2000" b="1" dirty="0">
+              <a:rPr lang="en-US" b="1" dirty="0">
                 <a:latin typeface="Arial" panose="020B0604020202020204" pitchFamily="34" charset="0"/>
                 <a:cs typeface="Arial" panose="020B0604020202020204" pitchFamily="34" charset="0"/>
               </a:rPr>
@@ -4411,8 +4463,8 @@
         </p:nvSpPr>
         <p:spPr>
           <a:xfrm>
-            <a:off x="5841666" y="2890188"/>
-            <a:ext cx="2056151" cy="457200"/>
+            <a:off x="5766761" y="2890188"/>
+            <a:ext cx="1833664" cy="457200"/>
           </a:xfrm>
           <a:prstGeom prst="roundRect">
             <a:avLst>
@@ -4458,13 +4510,13 @@
           <a:p>
             <a:pPr algn="ctr"/>
             <a:r>
-              <a:rPr lang="en-US" sz="2000" b="1" dirty="0" err="1">
+              <a:rPr lang="en-US" b="1" dirty="0" err="1">
                 <a:latin typeface="Arial" panose="020B0604020202020204" pitchFamily="34" charset="0"/>
                 <a:cs typeface="Arial" panose="020B0604020202020204" pitchFamily="34" charset="0"/>
               </a:rPr>
               <a:t>TimeIntervals</a:t>
             </a:r>
-            <a:endParaRPr lang="en-US" sz="1200" b="1" dirty="0">
+            <a:endParaRPr lang="en-US" b="1" dirty="0">
               <a:latin typeface="Arial" panose="020B0604020202020204" pitchFamily="34" charset="0"/>
               <a:cs typeface="Arial" panose="020B0604020202020204" pitchFamily="34" charset="0"/>
             </a:endParaRPr>
@@ -4485,8 +4537,8 @@
         </p:nvSpPr>
         <p:spPr>
           <a:xfrm>
-            <a:off x="5655038" y="2280599"/>
-            <a:ext cx="2242776" cy="457200"/>
+            <a:off x="5580129" y="2280599"/>
+            <a:ext cx="2020296" cy="457200"/>
           </a:xfrm>
           <a:prstGeom prst="roundRect">
             <a:avLst>
@@ -4532,16 +4584,1145 @@
           <a:p>
             <a:pPr algn="ctr"/>
             <a:r>
-              <a:rPr lang="en-US" sz="2000" b="1" dirty="0" err="1">
+              <a:rPr lang="en-US" b="1" dirty="0" err="1">
                 <a:latin typeface="Arial" panose="020B0604020202020204" pitchFamily="34" charset="0"/>
                 <a:cs typeface="Arial" panose="020B0604020202020204" pitchFamily="34" charset="0"/>
               </a:rPr>
               <a:t>MeaningsTable</a:t>
             </a:r>
-            <a:endParaRPr lang="en-US" sz="1200" b="1" dirty="0">
+            <a:endParaRPr lang="en-US" b="1" dirty="0">
               <a:latin typeface="Arial" panose="020B0604020202020204" pitchFamily="34" charset="0"/>
               <a:cs typeface="Arial" panose="020B0604020202020204" pitchFamily="34" charset="0"/>
             </a:endParaRPr>
+          </a:p>
+        </p:txBody>
+      </p:sp>
+      <p:sp>
+        <p:nvSpPr>
+          <p:cNvPr id="47" name="Freeform 46">
+            <a:extLst>
+              <a:ext uri="{FF2B5EF4-FFF2-40B4-BE49-F238E27FC236}">
+                <a16:creationId xmlns:a16="http://schemas.microsoft.com/office/drawing/2014/main" id="{E3051AEA-C751-AE4F-5D36-9EC382E3D0D2}"/>
+              </a:ext>
+            </a:extLst>
+          </p:cNvPr>
+          <p:cNvSpPr/>
+          <p:nvPr/>
+        </p:nvSpPr>
+        <p:spPr>
+          <a:xfrm rot="10800000">
+            <a:off x="4325" y="-1029"/>
+            <a:ext cx="1053823" cy="3749675"/>
+          </a:xfrm>
+          <a:custGeom>
+            <a:avLst/>
+            <a:gdLst>
+              <a:gd name="csX0" fmla="*/ 0 w 3470223"/>
+              <a:gd name="csY0" fmla="*/ 0 h 3305331"/>
+              <a:gd name="csX1" fmla="*/ 509666 w 3470223"/>
+              <a:gd name="csY1" fmla="*/ 1296649 h 3305331"/>
+              <a:gd name="csX2" fmla="*/ 816964 w 3470223"/>
+              <a:gd name="csY2" fmla="*/ 2226039 h 3305331"/>
+              <a:gd name="csX3" fmla="*/ 899410 w 3470223"/>
+              <a:gd name="csY3" fmla="*/ 2840636 h 3305331"/>
+              <a:gd name="csX4" fmla="*/ 944380 w 3470223"/>
+              <a:gd name="csY4" fmla="*/ 3305331 h 3305331"/>
+              <a:gd name="csX5" fmla="*/ 3470223 w 3470223"/>
+              <a:gd name="csY5" fmla="*/ 3297836 h 3305331"/>
+              <a:gd name="csX6" fmla="*/ 3455233 w 3470223"/>
+              <a:gd name="csY6" fmla="*/ 7495 h 3305331"/>
+              <a:gd name="csX7" fmla="*/ 0 w 3470223"/>
+              <a:gd name="csY7" fmla="*/ 0 h 3305331"/>
+              <a:gd name="csX0" fmla="*/ 149418 w 3619641"/>
+              <a:gd name="csY0" fmla="*/ 0 h 3305331"/>
+              <a:gd name="csX1" fmla="*/ 659084 w 3619641"/>
+              <a:gd name="csY1" fmla="*/ 1296649 h 3305331"/>
+              <a:gd name="csX2" fmla="*/ 966382 w 3619641"/>
+              <a:gd name="csY2" fmla="*/ 2226039 h 3305331"/>
+              <a:gd name="csX3" fmla="*/ 1048828 w 3619641"/>
+              <a:gd name="csY3" fmla="*/ 2840636 h 3305331"/>
+              <a:gd name="csX4" fmla="*/ 1093798 w 3619641"/>
+              <a:gd name="csY4" fmla="*/ 3305331 h 3305331"/>
+              <a:gd name="csX5" fmla="*/ 3619641 w 3619641"/>
+              <a:gd name="csY5" fmla="*/ 3297836 h 3305331"/>
+              <a:gd name="csX6" fmla="*/ 3604651 w 3619641"/>
+              <a:gd name="csY6" fmla="*/ 7495 h 3305331"/>
+              <a:gd name="csX7" fmla="*/ 149418 w 3619641"/>
+              <a:gd name="csY7" fmla="*/ 0 h 3305331"/>
+              <a:gd name="csX0" fmla="*/ 149418 w 3619641"/>
+              <a:gd name="csY0" fmla="*/ 0 h 3305331"/>
+              <a:gd name="csX1" fmla="*/ 659084 w 3619641"/>
+              <a:gd name="csY1" fmla="*/ 1296649 h 3305331"/>
+              <a:gd name="csX2" fmla="*/ 966382 w 3619641"/>
+              <a:gd name="csY2" fmla="*/ 2226039 h 3305331"/>
+              <a:gd name="csX3" fmla="*/ 1048828 w 3619641"/>
+              <a:gd name="csY3" fmla="*/ 2840636 h 3305331"/>
+              <a:gd name="csX4" fmla="*/ 1093798 w 3619641"/>
+              <a:gd name="csY4" fmla="*/ 3305331 h 3305331"/>
+              <a:gd name="csX5" fmla="*/ 3619641 w 3619641"/>
+              <a:gd name="csY5" fmla="*/ 3297836 h 3305331"/>
+              <a:gd name="csX6" fmla="*/ 3604651 w 3619641"/>
+              <a:gd name="csY6" fmla="*/ 7495 h 3305331"/>
+              <a:gd name="csX7" fmla="*/ 149418 w 3619641"/>
+              <a:gd name="csY7" fmla="*/ 0 h 3305331"/>
+              <a:gd name="csX0" fmla="*/ 149418 w 3619641"/>
+              <a:gd name="csY0" fmla="*/ 0 h 3305331"/>
+              <a:gd name="csX1" fmla="*/ 659084 w 3619641"/>
+              <a:gd name="csY1" fmla="*/ 1296649 h 3305331"/>
+              <a:gd name="csX2" fmla="*/ 966382 w 3619641"/>
+              <a:gd name="csY2" fmla="*/ 2226039 h 3305331"/>
+              <a:gd name="csX3" fmla="*/ 1048828 w 3619641"/>
+              <a:gd name="csY3" fmla="*/ 2840636 h 3305331"/>
+              <a:gd name="csX4" fmla="*/ 1093798 w 3619641"/>
+              <a:gd name="csY4" fmla="*/ 3305331 h 3305331"/>
+              <a:gd name="csX5" fmla="*/ 3619641 w 3619641"/>
+              <a:gd name="csY5" fmla="*/ 3297836 h 3305331"/>
+              <a:gd name="csX6" fmla="*/ 3604651 w 3619641"/>
+              <a:gd name="csY6" fmla="*/ 7495 h 3305331"/>
+              <a:gd name="csX7" fmla="*/ 149418 w 3619641"/>
+              <a:gd name="csY7" fmla="*/ 0 h 3305331"/>
+              <a:gd name="csX0" fmla="*/ 149418 w 3619641"/>
+              <a:gd name="csY0" fmla="*/ 0 h 3305331"/>
+              <a:gd name="csX1" fmla="*/ 659084 w 3619641"/>
+              <a:gd name="csY1" fmla="*/ 1296649 h 3305331"/>
+              <a:gd name="csX2" fmla="*/ 966382 w 3619641"/>
+              <a:gd name="csY2" fmla="*/ 2226039 h 3305331"/>
+              <a:gd name="csX3" fmla="*/ 1048828 w 3619641"/>
+              <a:gd name="csY3" fmla="*/ 2840636 h 3305331"/>
+              <a:gd name="csX4" fmla="*/ 1093798 w 3619641"/>
+              <a:gd name="csY4" fmla="*/ 3305331 h 3305331"/>
+              <a:gd name="csX5" fmla="*/ 3619641 w 3619641"/>
+              <a:gd name="csY5" fmla="*/ 3297836 h 3305331"/>
+              <a:gd name="csX6" fmla="*/ 3604651 w 3619641"/>
+              <a:gd name="csY6" fmla="*/ 7495 h 3305331"/>
+              <a:gd name="csX7" fmla="*/ 149418 w 3619641"/>
+              <a:gd name="csY7" fmla="*/ 0 h 3305331"/>
+              <a:gd name="csX0" fmla="*/ 149418 w 3619641"/>
+              <a:gd name="csY0" fmla="*/ 0 h 3305331"/>
+              <a:gd name="csX1" fmla="*/ 659084 w 3619641"/>
+              <a:gd name="csY1" fmla="*/ 1296649 h 3305331"/>
+              <a:gd name="csX2" fmla="*/ 966382 w 3619641"/>
+              <a:gd name="csY2" fmla="*/ 2226039 h 3305331"/>
+              <a:gd name="csX3" fmla="*/ 1048828 w 3619641"/>
+              <a:gd name="csY3" fmla="*/ 2840636 h 3305331"/>
+              <a:gd name="csX4" fmla="*/ 1093798 w 3619641"/>
+              <a:gd name="csY4" fmla="*/ 3305331 h 3305331"/>
+              <a:gd name="csX5" fmla="*/ 3619641 w 3619641"/>
+              <a:gd name="csY5" fmla="*/ 3297836 h 3305331"/>
+              <a:gd name="csX6" fmla="*/ 3604651 w 3619641"/>
+              <a:gd name="csY6" fmla="*/ 7495 h 3305331"/>
+              <a:gd name="csX7" fmla="*/ 149418 w 3619641"/>
+              <a:gd name="csY7" fmla="*/ 0 h 3305331"/>
+              <a:gd name="csX0" fmla="*/ 0 w 3470223"/>
+              <a:gd name="csY0" fmla="*/ 0 h 3305331"/>
+              <a:gd name="csX1" fmla="*/ 509666 w 3470223"/>
+              <a:gd name="csY1" fmla="*/ 1296649 h 3305331"/>
+              <a:gd name="csX2" fmla="*/ 816964 w 3470223"/>
+              <a:gd name="csY2" fmla="*/ 2226039 h 3305331"/>
+              <a:gd name="csX3" fmla="*/ 899410 w 3470223"/>
+              <a:gd name="csY3" fmla="*/ 2840636 h 3305331"/>
+              <a:gd name="csX4" fmla="*/ 944380 w 3470223"/>
+              <a:gd name="csY4" fmla="*/ 3305331 h 3305331"/>
+              <a:gd name="csX5" fmla="*/ 3470223 w 3470223"/>
+              <a:gd name="csY5" fmla="*/ 3297836 h 3305331"/>
+              <a:gd name="csX6" fmla="*/ 3455233 w 3470223"/>
+              <a:gd name="csY6" fmla="*/ 7495 h 3305331"/>
+              <a:gd name="csX7" fmla="*/ 0 w 3470223"/>
+              <a:gd name="csY7" fmla="*/ 0 h 3305331"/>
+              <a:gd name="csX0" fmla="*/ 0 w 3470223"/>
+              <a:gd name="csY0" fmla="*/ 0 h 3305331"/>
+              <a:gd name="csX1" fmla="*/ 509666 w 3470223"/>
+              <a:gd name="csY1" fmla="*/ 1296649 h 3305331"/>
+              <a:gd name="csX2" fmla="*/ 764499 w 3470223"/>
+              <a:gd name="csY2" fmla="*/ 2031167 h 3305331"/>
+              <a:gd name="csX3" fmla="*/ 899410 w 3470223"/>
+              <a:gd name="csY3" fmla="*/ 2840636 h 3305331"/>
+              <a:gd name="csX4" fmla="*/ 944380 w 3470223"/>
+              <a:gd name="csY4" fmla="*/ 3305331 h 3305331"/>
+              <a:gd name="csX5" fmla="*/ 3470223 w 3470223"/>
+              <a:gd name="csY5" fmla="*/ 3297836 h 3305331"/>
+              <a:gd name="csX6" fmla="*/ 3455233 w 3470223"/>
+              <a:gd name="csY6" fmla="*/ 7495 h 3305331"/>
+              <a:gd name="csX7" fmla="*/ 0 w 3470223"/>
+              <a:gd name="csY7" fmla="*/ 0 h 3305331"/>
+              <a:gd name="csX0" fmla="*/ 0 w 3470223"/>
+              <a:gd name="csY0" fmla="*/ 0 h 3305331"/>
+              <a:gd name="csX1" fmla="*/ 509666 w 3470223"/>
+              <a:gd name="csY1" fmla="*/ 1296649 h 3305331"/>
+              <a:gd name="csX2" fmla="*/ 764499 w 3470223"/>
+              <a:gd name="csY2" fmla="*/ 2031167 h 3305331"/>
+              <a:gd name="csX3" fmla="*/ 899410 w 3470223"/>
+              <a:gd name="csY3" fmla="*/ 2840636 h 3305331"/>
+              <a:gd name="csX4" fmla="*/ 944380 w 3470223"/>
+              <a:gd name="csY4" fmla="*/ 3305331 h 3305331"/>
+              <a:gd name="csX5" fmla="*/ 3470223 w 3470223"/>
+              <a:gd name="csY5" fmla="*/ 3297836 h 3305331"/>
+              <a:gd name="csX6" fmla="*/ 3455233 w 3470223"/>
+              <a:gd name="csY6" fmla="*/ 7495 h 3305331"/>
+              <a:gd name="csX7" fmla="*/ 0 w 3470223"/>
+              <a:gd name="csY7" fmla="*/ 0 h 3305331"/>
+              <a:gd name="csX0" fmla="*/ 0 w 3470223"/>
+              <a:gd name="csY0" fmla="*/ 0 h 3305331"/>
+              <a:gd name="csX1" fmla="*/ 509666 w 3470223"/>
+              <a:gd name="csY1" fmla="*/ 1296649 h 3305331"/>
+              <a:gd name="csX2" fmla="*/ 764499 w 3470223"/>
+              <a:gd name="csY2" fmla="*/ 2031167 h 3305331"/>
+              <a:gd name="csX3" fmla="*/ 899410 w 3470223"/>
+              <a:gd name="csY3" fmla="*/ 2840636 h 3305331"/>
+              <a:gd name="csX4" fmla="*/ 944380 w 3470223"/>
+              <a:gd name="csY4" fmla="*/ 3305331 h 3305331"/>
+              <a:gd name="csX5" fmla="*/ 3470223 w 3470223"/>
+              <a:gd name="csY5" fmla="*/ 3297836 h 3305331"/>
+              <a:gd name="csX6" fmla="*/ 3455233 w 3470223"/>
+              <a:gd name="csY6" fmla="*/ 7495 h 3305331"/>
+              <a:gd name="csX7" fmla="*/ 0 w 3470223"/>
+              <a:gd name="csY7" fmla="*/ 0 h 3305331"/>
+              <a:gd name="csX0" fmla="*/ 0 w 3470223"/>
+              <a:gd name="csY0" fmla="*/ 0 h 3305331"/>
+              <a:gd name="csX1" fmla="*/ 509666 w 3470223"/>
+              <a:gd name="csY1" fmla="*/ 1296649 h 3305331"/>
+              <a:gd name="csX2" fmla="*/ 764499 w 3470223"/>
+              <a:gd name="csY2" fmla="*/ 2031167 h 3305331"/>
+              <a:gd name="csX3" fmla="*/ 944380 w 3470223"/>
+              <a:gd name="csY3" fmla="*/ 3305331 h 3305331"/>
+              <a:gd name="csX4" fmla="*/ 3470223 w 3470223"/>
+              <a:gd name="csY4" fmla="*/ 3297836 h 3305331"/>
+              <a:gd name="csX5" fmla="*/ 3455233 w 3470223"/>
+              <a:gd name="csY5" fmla="*/ 7495 h 3305331"/>
+              <a:gd name="csX6" fmla="*/ 0 w 3470223"/>
+              <a:gd name="csY6" fmla="*/ 0 h 3305331"/>
+              <a:gd name="csX0" fmla="*/ 0 w 3470223"/>
+              <a:gd name="csY0" fmla="*/ 0 h 3305331"/>
+              <a:gd name="csX1" fmla="*/ 509666 w 3470223"/>
+              <a:gd name="csY1" fmla="*/ 1296649 h 3305331"/>
+              <a:gd name="csX2" fmla="*/ 764499 w 3470223"/>
+              <a:gd name="csY2" fmla="*/ 2031167 h 3305331"/>
+              <a:gd name="csX3" fmla="*/ 944380 w 3470223"/>
+              <a:gd name="csY3" fmla="*/ 3305331 h 3305331"/>
+              <a:gd name="csX4" fmla="*/ 3470223 w 3470223"/>
+              <a:gd name="csY4" fmla="*/ 3297836 h 3305331"/>
+              <a:gd name="csX5" fmla="*/ 3455233 w 3470223"/>
+              <a:gd name="csY5" fmla="*/ 7495 h 3305331"/>
+              <a:gd name="csX6" fmla="*/ 0 w 3470223"/>
+              <a:gd name="csY6" fmla="*/ 0 h 3305331"/>
+              <a:gd name="csX0" fmla="*/ 0 w 3470223"/>
+              <a:gd name="csY0" fmla="*/ 0 h 3305331"/>
+              <a:gd name="csX1" fmla="*/ 509666 w 3470223"/>
+              <a:gd name="csY1" fmla="*/ 1296649 h 3305331"/>
+              <a:gd name="csX2" fmla="*/ 764499 w 3470223"/>
+              <a:gd name="csY2" fmla="*/ 2031167 h 3305331"/>
+              <a:gd name="csX3" fmla="*/ 944380 w 3470223"/>
+              <a:gd name="csY3" fmla="*/ 3305331 h 3305331"/>
+              <a:gd name="csX4" fmla="*/ 3470223 w 3470223"/>
+              <a:gd name="csY4" fmla="*/ 3297836 h 3305331"/>
+              <a:gd name="csX5" fmla="*/ 3455233 w 3470223"/>
+              <a:gd name="csY5" fmla="*/ 7495 h 3305331"/>
+              <a:gd name="csX6" fmla="*/ 0 w 3470223"/>
+              <a:gd name="csY6" fmla="*/ 0 h 3305331"/>
+              <a:gd name="csX0" fmla="*/ 0 w 3470223"/>
+              <a:gd name="csY0" fmla="*/ 0 h 3305331"/>
+              <a:gd name="csX1" fmla="*/ 509666 w 3470223"/>
+              <a:gd name="csY1" fmla="*/ 1296649 h 3305331"/>
+              <a:gd name="csX2" fmla="*/ 764499 w 3470223"/>
+              <a:gd name="csY2" fmla="*/ 2031167 h 3305331"/>
+              <a:gd name="csX3" fmla="*/ 944380 w 3470223"/>
+              <a:gd name="csY3" fmla="*/ 3305331 h 3305331"/>
+              <a:gd name="csX4" fmla="*/ 3470223 w 3470223"/>
+              <a:gd name="csY4" fmla="*/ 3297836 h 3305331"/>
+              <a:gd name="csX5" fmla="*/ 3455233 w 3470223"/>
+              <a:gd name="csY5" fmla="*/ 7495 h 3305331"/>
+              <a:gd name="csX6" fmla="*/ 0 w 3470223"/>
+              <a:gd name="csY6" fmla="*/ 0 h 3305331"/>
+              <a:gd name="csX0" fmla="*/ 0 w 3470223"/>
+              <a:gd name="csY0" fmla="*/ 0 h 3305331"/>
+              <a:gd name="csX1" fmla="*/ 509666 w 3470223"/>
+              <a:gd name="csY1" fmla="*/ 1296649 h 3305331"/>
+              <a:gd name="csX2" fmla="*/ 764499 w 3470223"/>
+              <a:gd name="csY2" fmla="*/ 2031167 h 3305331"/>
+              <a:gd name="csX3" fmla="*/ 944380 w 3470223"/>
+              <a:gd name="csY3" fmla="*/ 3305331 h 3305331"/>
+              <a:gd name="csX4" fmla="*/ 3470223 w 3470223"/>
+              <a:gd name="csY4" fmla="*/ 3297836 h 3305331"/>
+              <a:gd name="csX5" fmla="*/ 3455233 w 3470223"/>
+              <a:gd name="csY5" fmla="*/ 7495 h 3305331"/>
+              <a:gd name="csX6" fmla="*/ 0 w 3470223"/>
+              <a:gd name="csY6" fmla="*/ 0 h 3305331"/>
+              <a:gd name="csX0" fmla="*/ 0 w 3470223"/>
+              <a:gd name="csY0" fmla="*/ 0 h 3305331"/>
+              <a:gd name="csX1" fmla="*/ 509666 w 3470223"/>
+              <a:gd name="csY1" fmla="*/ 1296649 h 3305331"/>
+              <a:gd name="csX2" fmla="*/ 944380 w 3470223"/>
+              <a:gd name="csY2" fmla="*/ 3305331 h 3305331"/>
+              <a:gd name="csX3" fmla="*/ 3470223 w 3470223"/>
+              <a:gd name="csY3" fmla="*/ 3297836 h 3305331"/>
+              <a:gd name="csX4" fmla="*/ 3455233 w 3470223"/>
+              <a:gd name="csY4" fmla="*/ 7495 h 3305331"/>
+              <a:gd name="csX5" fmla="*/ 0 w 3470223"/>
+              <a:gd name="csY5" fmla="*/ 0 h 3305331"/>
+              <a:gd name="csX0" fmla="*/ 0 w 3470223"/>
+              <a:gd name="csY0" fmla="*/ 0 h 3305331"/>
+              <a:gd name="csX1" fmla="*/ 509666 w 3470223"/>
+              <a:gd name="csY1" fmla="*/ 1296649 h 3305331"/>
+              <a:gd name="csX2" fmla="*/ 944380 w 3470223"/>
+              <a:gd name="csY2" fmla="*/ 3305331 h 3305331"/>
+              <a:gd name="csX3" fmla="*/ 3470223 w 3470223"/>
+              <a:gd name="csY3" fmla="*/ 3297836 h 3305331"/>
+              <a:gd name="csX4" fmla="*/ 3455233 w 3470223"/>
+              <a:gd name="csY4" fmla="*/ 7495 h 3305331"/>
+              <a:gd name="csX5" fmla="*/ 0 w 3470223"/>
+              <a:gd name="csY5" fmla="*/ 0 h 3305331"/>
+            </a:gdLst>
+            <a:ahLst/>
+            <a:cxnLst>
+              <a:cxn ang="0">
+                <a:pos x="csX0" y="csY0"/>
+              </a:cxn>
+              <a:cxn ang="0">
+                <a:pos x="csX1" y="csY1"/>
+              </a:cxn>
+              <a:cxn ang="0">
+                <a:pos x="csX2" y="csY2"/>
+              </a:cxn>
+              <a:cxn ang="0">
+                <a:pos x="csX3" y="csY3"/>
+              </a:cxn>
+              <a:cxn ang="0">
+                <a:pos x="csX4" y="csY4"/>
+              </a:cxn>
+              <a:cxn ang="0">
+                <a:pos x="csX5" y="csY5"/>
+              </a:cxn>
+            </a:cxnLst>
+            <a:rect l="l" t="t" r="r" b="b"/>
+            <a:pathLst>
+              <a:path w="3470223" h="3305331">
+                <a:moveTo>
+                  <a:pt x="0" y="0"/>
+                </a:moveTo>
+                <a:cubicBezTo>
+                  <a:pt x="513413" y="357266"/>
+                  <a:pt x="352269" y="745760"/>
+                  <a:pt x="509666" y="1296649"/>
+                </a:cubicBezTo>
+                <a:cubicBezTo>
+                  <a:pt x="667063" y="1847538"/>
+                  <a:pt x="1320383" y="2192312"/>
+                  <a:pt x="944380" y="3305331"/>
+                </a:cubicBezTo>
+                <a:lnTo>
+                  <a:pt x="3470223" y="3297836"/>
+                </a:lnTo>
+                <a:cubicBezTo>
+                  <a:pt x="3465226" y="2201056"/>
+                  <a:pt x="3460230" y="1104275"/>
+                  <a:pt x="3455233" y="7495"/>
+                </a:cubicBezTo>
+                <a:lnTo>
+                  <a:pt x="0" y="0"/>
+                </a:lnTo>
+                <a:close/>
+              </a:path>
+            </a:pathLst>
+          </a:custGeom>
+          <a:solidFill>
+            <a:srgbClr val="0A4D7C"/>
+          </a:solidFill>
+          <a:ln>
+            <a:noFill/>
+          </a:ln>
+        </p:spPr>
+        <p:style>
+          <a:lnRef idx="2">
+            <a:schemeClr val="accent1">
+              <a:shade val="15000"/>
+            </a:schemeClr>
+          </a:lnRef>
+          <a:fillRef idx="1">
+            <a:schemeClr val="accent1"/>
+          </a:fillRef>
+          <a:effectRef idx="0">
+            <a:schemeClr val="accent1"/>
+          </a:effectRef>
+          <a:fontRef idx="minor">
+            <a:schemeClr val="lt1"/>
+          </a:fontRef>
+        </p:style>
+        <p:txBody>
+          <a:bodyPr rtlCol="0" anchor="ctr"/>
+          <a:lstStyle/>
+          <a:p>
+            <a:pPr algn="ctr"/>
+            <a:endParaRPr lang="en-US"/>
+          </a:p>
+        </p:txBody>
+      </p:sp>
+      <p:sp>
+        <p:nvSpPr>
+          <p:cNvPr id="48" name="Freeform 47">
+            <a:extLst>
+              <a:ext uri="{FF2B5EF4-FFF2-40B4-BE49-F238E27FC236}">
+                <a16:creationId xmlns:a16="http://schemas.microsoft.com/office/drawing/2014/main" id="{298DB1D8-4772-3704-3A4E-B82889D0A136}"/>
+              </a:ext>
+            </a:extLst>
+          </p:cNvPr>
+          <p:cNvSpPr/>
+          <p:nvPr/>
+        </p:nvSpPr>
+        <p:spPr>
+          <a:xfrm rot="10800000">
+            <a:off x="0" y="-1"/>
+            <a:ext cx="1008546" cy="3749675"/>
+          </a:xfrm>
+          <a:custGeom>
+            <a:avLst/>
+            <a:gdLst>
+              <a:gd name="csX0" fmla="*/ 0 w 3470223"/>
+              <a:gd name="csY0" fmla="*/ 0 h 3305331"/>
+              <a:gd name="csX1" fmla="*/ 509666 w 3470223"/>
+              <a:gd name="csY1" fmla="*/ 1296649 h 3305331"/>
+              <a:gd name="csX2" fmla="*/ 816964 w 3470223"/>
+              <a:gd name="csY2" fmla="*/ 2226039 h 3305331"/>
+              <a:gd name="csX3" fmla="*/ 899410 w 3470223"/>
+              <a:gd name="csY3" fmla="*/ 2840636 h 3305331"/>
+              <a:gd name="csX4" fmla="*/ 944380 w 3470223"/>
+              <a:gd name="csY4" fmla="*/ 3305331 h 3305331"/>
+              <a:gd name="csX5" fmla="*/ 3470223 w 3470223"/>
+              <a:gd name="csY5" fmla="*/ 3297836 h 3305331"/>
+              <a:gd name="csX6" fmla="*/ 3455233 w 3470223"/>
+              <a:gd name="csY6" fmla="*/ 7495 h 3305331"/>
+              <a:gd name="csX7" fmla="*/ 0 w 3470223"/>
+              <a:gd name="csY7" fmla="*/ 0 h 3305331"/>
+              <a:gd name="csX0" fmla="*/ 149418 w 3619641"/>
+              <a:gd name="csY0" fmla="*/ 0 h 3305331"/>
+              <a:gd name="csX1" fmla="*/ 659084 w 3619641"/>
+              <a:gd name="csY1" fmla="*/ 1296649 h 3305331"/>
+              <a:gd name="csX2" fmla="*/ 966382 w 3619641"/>
+              <a:gd name="csY2" fmla="*/ 2226039 h 3305331"/>
+              <a:gd name="csX3" fmla="*/ 1048828 w 3619641"/>
+              <a:gd name="csY3" fmla="*/ 2840636 h 3305331"/>
+              <a:gd name="csX4" fmla="*/ 1093798 w 3619641"/>
+              <a:gd name="csY4" fmla="*/ 3305331 h 3305331"/>
+              <a:gd name="csX5" fmla="*/ 3619641 w 3619641"/>
+              <a:gd name="csY5" fmla="*/ 3297836 h 3305331"/>
+              <a:gd name="csX6" fmla="*/ 3604651 w 3619641"/>
+              <a:gd name="csY6" fmla="*/ 7495 h 3305331"/>
+              <a:gd name="csX7" fmla="*/ 149418 w 3619641"/>
+              <a:gd name="csY7" fmla="*/ 0 h 3305331"/>
+              <a:gd name="csX0" fmla="*/ 149418 w 3619641"/>
+              <a:gd name="csY0" fmla="*/ 0 h 3305331"/>
+              <a:gd name="csX1" fmla="*/ 659084 w 3619641"/>
+              <a:gd name="csY1" fmla="*/ 1296649 h 3305331"/>
+              <a:gd name="csX2" fmla="*/ 966382 w 3619641"/>
+              <a:gd name="csY2" fmla="*/ 2226039 h 3305331"/>
+              <a:gd name="csX3" fmla="*/ 1048828 w 3619641"/>
+              <a:gd name="csY3" fmla="*/ 2840636 h 3305331"/>
+              <a:gd name="csX4" fmla="*/ 1093798 w 3619641"/>
+              <a:gd name="csY4" fmla="*/ 3305331 h 3305331"/>
+              <a:gd name="csX5" fmla="*/ 3619641 w 3619641"/>
+              <a:gd name="csY5" fmla="*/ 3297836 h 3305331"/>
+              <a:gd name="csX6" fmla="*/ 3604651 w 3619641"/>
+              <a:gd name="csY6" fmla="*/ 7495 h 3305331"/>
+              <a:gd name="csX7" fmla="*/ 149418 w 3619641"/>
+              <a:gd name="csY7" fmla="*/ 0 h 3305331"/>
+              <a:gd name="csX0" fmla="*/ 149418 w 3619641"/>
+              <a:gd name="csY0" fmla="*/ 0 h 3305331"/>
+              <a:gd name="csX1" fmla="*/ 659084 w 3619641"/>
+              <a:gd name="csY1" fmla="*/ 1296649 h 3305331"/>
+              <a:gd name="csX2" fmla="*/ 966382 w 3619641"/>
+              <a:gd name="csY2" fmla="*/ 2226039 h 3305331"/>
+              <a:gd name="csX3" fmla="*/ 1048828 w 3619641"/>
+              <a:gd name="csY3" fmla="*/ 2840636 h 3305331"/>
+              <a:gd name="csX4" fmla="*/ 1093798 w 3619641"/>
+              <a:gd name="csY4" fmla="*/ 3305331 h 3305331"/>
+              <a:gd name="csX5" fmla="*/ 3619641 w 3619641"/>
+              <a:gd name="csY5" fmla="*/ 3297836 h 3305331"/>
+              <a:gd name="csX6" fmla="*/ 3604651 w 3619641"/>
+              <a:gd name="csY6" fmla="*/ 7495 h 3305331"/>
+              <a:gd name="csX7" fmla="*/ 149418 w 3619641"/>
+              <a:gd name="csY7" fmla="*/ 0 h 3305331"/>
+              <a:gd name="csX0" fmla="*/ 149418 w 3619641"/>
+              <a:gd name="csY0" fmla="*/ 0 h 3305331"/>
+              <a:gd name="csX1" fmla="*/ 659084 w 3619641"/>
+              <a:gd name="csY1" fmla="*/ 1296649 h 3305331"/>
+              <a:gd name="csX2" fmla="*/ 966382 w 3619641"/>
+              <a:gd name="csY2" fmla="*/ 2226039 h 3305331"/>
+              <a:gd name="csX3" fmla="*/ 1048828 w 3619641"/>
+              <a:gd name="csY3" fmla="*/ 2840636 h 3305331"/>
+              <a:gd name="csX4" fmla="*/ 1093798 w 3619641"/>
+              <a:gd name="csY4" fmla="*/ 3305331 h 3305331"/>
+              <a:gd name="csX5" fmla="*/ 3619641 w 3619641"/>
+              <a:gd name="csY5" fmla="*/ 3297836 h 3305331"/>
+              <a:gd name="csX6" fmla="*/ 3604651 w 3619641"/>
+              <a:gd name="csY6" fmla="*/ 7495 h 3305331"/>
+              <a:gd name="csX7" fmla="*/ 149418 w 3619641"/>
+              <a:gd name="csY7" fmla="*/ 0 h 3305331"/>
+              <a:gd name="csX0" fmla="*/ 149418 w 3619641"/>
+              <a:gd name="csY0" fmla="*/ 0 h 3305331"/>
+              <a:gd name="csX1" fmla="*/ 659084 w 3619641"/>
+              <a:gd name="csY1" fmla="*/ 1296649 h 3305331"/>
+              <a:gd name="csX2" fmla="*/ 966382 w 3619641"/>
+              <a:gd name="csY2" fmla="*/ 2226039 h 3305331"/>
+              <a:gd name="csX3" fmla="*/ 1048828 w 3619641"/>
+              <a:gd name="csY3" fmla="*/ 2840636 h 3305331"/>
+              <a:gd name="csX4" fmla="*/ 1093798 w 3619641"/>
+              <a:gd name="csY4" fmla="*/ 3305331 h 3305331"/>
+              <a:gd name="csX5" fmla="*/ 3619641 w 3619641"/>
+              <a:gd name="csY5" fmla="*/ 3297836 h 3305331"/>
+              <a:gd name="csX6" fmla="*/ 3604651 w 3619641"/>
+              <a:gd name="csY6" fmla="*/ 7495 h 3305331"/>
+              <a:gd name="csX7" fmla="*/ 149418 w 3619641"/>
+              <a:gd name="csY7" fmla="*/ 0 h 3305331"/>
+              <a:gd name="csX0" fmla="*/ 0 w 3470223"/>
+              <a:gd name="csY0" fmla="*/ 0 h 3305331"/>
+              <a:gd name="csX1" fmla="*/ 509666 w 3470223"/>
+              <a:gd name="csY1" fmla="*/ 1296649 h 3305331"/>
+              <a:gd name="csX2" fmla="*/ 816964 w 3470223"/>
+              <a:gd name="csY2" fmla="*/ 2226039 h 3305331"/>
+              <a:gd name="csX3" fmla="*/ 899410 w 3470223"/>
+              <a:gd name="csY3" fmla="*/ 2840636 h 3305331"/>
+              <a:gd name="csX4" fmla="*/ 944380 w 3470223"/>
+              <a:gd name="csY4" fmla="*/ 3305331 h 3305331"/>
+              <a:gd name="csX5" fmla="*/ 3470223 w 3470223"/>
+              <a:gd name="csY5" fmla="*/ 3297836 h 3305331"/>
+              <a:gd name="csX6" fmla="*/ 3455233 w 3470223"/>
+              <a:gd name="csY6" fmla="*/ 7495 h 3305331"/>
+              <a:gd name="csX7" fmla="*/ 0 w 3470223"/>
+              <a:gd name="csY7" fmla="*/ 0 h 3305331"/>
+              <a:gd name="csX0" fmla="*/ 0 w 3470223"/>
+              <a:gd name="csY0" fmla="*/ 0 h 3305331"/>
+              <a:gd name="csX1" fmla="*/ 509666 w 3470223"/>
+              <a:gd name="csY1" fmla="*/ 1296649 h 3305331"/>
+              <a:gd name="csX2" fmla="*/ 764499 w 3470223"/>
+              <a:gd name="csY2" fmla="*/ 2031167 h 3305331"/>
+              <a:gd name="csX3" fmla="*/ 899410 w 3470223"/>
+              <a:gd name="csY3" fmla="*/ 2840636 h 3305331"/>
+              <a:gd name="csX4" fmla="*/ 944380 w 3470223"/>
+              <a:gd name="csY4" fmla="*/ 3305331 h 3305331"/>
+              <a:gd name="csX5" fmla="*/ 3470223 w 3470223"/>
+              <a:gd name="csY5" fmla="*/ 3297836 h 3305331"/>
+              <a:gd name="csX6" fmla="*/ 3455233 w 3470223"/>
+              <a:gd name="csY6" fmla="*/ 7495 h 3305331"/>
+              <a:gd name="csX7" fmla="*/ 0 w 3470223"/>
+              <a:gd name="csY7" fmla="*/ 0 h 3305331"/>
+              <a:gd name="csX0" fmla="*/ 0 w 3470223"/>
+              <a:gd name="csY0" fmla="*/ 0 h 3305331"/>
+              <a:gd name="csX1" fmla="*/ 509666 w 3470223"/>
+              <a:gd name="csY1" fmla="*/ 1296649 h 3305331"/>
+              <a:gd name="csX2" fmla="*/ 764499 w 3470223"/>
+              <a:gd name="csY2" fmla="*/ 2031167 h 3305331"/>
+              <a:gd name="csX3" fmla="*/ 899410 w 3470223"/>
+              <a:gd name="csY3" fmla="*/ 2840636 h 3305331"/>
+              <a:gd name="csX4" fmla="*/ 944380 w 3470223"/>
+              <a:gd name="csY4" fmla="*/ 3305331 h 3305331"/>
+              <a:gd name="csX5" fmla="*/ 3470223 w 3470223"/>
+              <a:gd name="csY5" fmla="*/ 3297836 h 3305331"/>
+              <a:gd name="csX6" fmla="*/ 3455233 w 3470223"/>
+              <a:gd name="csY6" fmla="*/ 7495 h 3305331"/>
+              <a:gd name="csX7" fmla="*/ 0 w 3470223"/>
+              <a:gd name="csY7" fmla="*/ 0 h 3305331"/>
+              <a:gd name="csX0" fmla="*/ 0 w 3470223"/>
+              <a:gd name="csY0" fmla="*/ 0 h 3305331"/>
+              <a:gd name="csX1" fmla="*/ 509666 w 3470223"/>
+              <a:gd name="csY1" fmla="*/ 1296649 h 3305331"/>
+              <a:gd name="csX2" fmla="*/ 764499 w 3470223"/>
+              <a:gd name="csY2" fmla="*/ 2031167 h 3305331"/>
+              <a:gd name="csX3" fmla="*/ 899410 w 3470223"/>
+              <a:gd name="csY3" fmla="*/ 2840636 h 3305331"/>
+              <a:gd name="csX4" fmla="*/ 944380 w 3470223"/>
+              <a:gd name="csY4" fmla="*/ 3305331 h 3305331"/>
+              <a:gd name="csX5" fmla="*/ 3470223 w 3470223"/>
+              <a:gd name="csY5" fmla="*/ 3297836 h 3305331"/>
+              <a:gd name="csX6" fmla="*/ 3455233 w 3470223"/>
+              <a:gd name="csY6" fmla="*/ 7495 h 3305331"/>
+              <a:gd name="csX7" fmla="*/ 0 w 3470223"/>
+              <a:gd name="csY7" fmla="*/ 0 h 3305331"/>
+              <a:gd name="csX0" fmla="*/ 0 w 3470223"/>
+              <a:gd name="csY0" fmla="*/ 0 h 3305331"/>
+              <a:gd name="csX1" fmla="*/ 509666 w 3470223"/>
+              <a:gd name="csY1" fmla="*/ 1296649 h 3305331"/>
+              <a:gd name="csX2" fmla="*/ 764499 w 3470223"/>
+              <a:gd name="csY2" fmla="*/ 2031167 h 3305331"/>
+              <a:gd name="csX3" fmla="*/ 944380 w 3470223"/>
+              <a:gd name="csY3" fmla="*/ 3305331 h 3305331"/>
+              <a:gd name="csX4" fmla="*/ 3470223 w 3470223"/>
+              <a:gd name="csY4" fmla="*/ 3297836 h 3305331"/>
+              <a:gd name="csX5" fmla="*/ 3455233 w 3470223"/>
+              <a:gd name="csY5" fmla="*/ 7495 h 3305331"/>
+              <a:gd name="csX6" fmla="*/ 0 w 3470223"/>
+              <a:gd name="csY6" fmla="*/ 0 h 3305331"/>
+              <a:gd name="csX0" fmla="*/ 0 w 3470223"/>
+              <a:gd name="csY0" fmla="*/ 0 h 3305331"/>
+              <a:gd name="csX1" fmla="*/ 509666 w 3470223"/>
+              <a:gd name="csY1" fmla="*/ 1296649 h 3305331"/>
+              <a:gd name="csX2" fmla="*/ 764499 w 3470223"/>
+              <a:gd name="csY2" fmla="*/ 2031167 h 3305331"/>
+              <a:gd name="csX3" fmla="*/ 944380 w 3470223"/>
+              <a:gd name="csY3" fmla="*/ 3305331 h 3305331"/>
+              <a:gd name="csX4" fmla="*/ 3470223 w 3470223"/>
+              <a:gd name="csY4" fmla="*/ 3297836 h 3305331"/>
+              <a:gd name="csX5" fmla="*/ 3455233 w 3470223"/>
+              <a:gd name="csY5" fmla="*/ 7495 h 3305331"/>
+              <a:gd name="csX6" fmla="*/ 0 w 3470223"/>
+              <a:gd name="csY6" fmla="*/ 0 h 3305331"/>
+              <a:gd name="csX0" fmla="*/ 0 w 3470223"/>
+              <a:gd name="csY0" fmla="*/ 0 h 3305331"/>
+              <a:gd name="csX1" fmla="*/ 509666 w 3470223"/>
+              <a:gd name="csY1" fmla="*/ 1296649 h 3305331"/>
+              <a:gd name="csX2" fmla="*/ 764499 w 3470223"/>
+              <a:gd name="csY2" fmla="*/ 2031167 h 3305331"/>
+              <a:gd name="csX3" fmla="*/ 944380 w 3470223"/>
+              <a:gd name="csY3" fmla="*/ 3305331 h 3305331"/>
+              <a:gd name="csX4" fmla="*/ 3470223 w 3470223"/>
+              <a:gd name="csY4" fmla="*/ 3297836 h 3305331"/>
+              <a:gd name="csX5" fmla="*/ 3455233 w 3470223"/>
+              <a:gd name="csY5" fmla="*/ 7495 h 3305331"/>
+              <a:gd name="csX6" fmla="*/ 0 w 3470223"/>
+              <a:gd name="csY6" fmla="*/ 0 h 3305331"/>
+              <a:gd name="csX0" fmla="*/ 0 w 3470223"/>
+              <a:gd name="csY0" fmla="*/ 0 h 3305331"/>
+              <a:gd name="csX1" fmla="*/ 509666 w 3470223"/>
+              <a:gd name="csY1" fmla="*/ 1296649 h 3305331"/>
+              <a:gd name="csX2" fmla="*/ 764499 w 3470223"/>
+              <a:gd name="csY2" fmla="*/ 2031167 h 3305331"/>
+              <a:gd name="csX3" fmla="*/ 944380 w 3470223"/>
+              <a:gd name="csY3" fmla="*/ 3305331 h 3305331"/>
+              <a:gd name="csX4" fmla="*/ 3470223 w 3470223"/>
+              <a:gd name="csY4" fmla="*/ 3297836 h 3305331"/>
+              <a:gd name="csX5" fmla="*/ 3455233 w 3470223"/>
+              <a:gd name="csY5" fmla="*/ 7495 h 3305331"/>
+              <a:gd name="csX6" fmla="*/ 0 w 3470223"/>
+              <a:gd name="csY6" fmla="*/ 0 h 3305331"/>
+              <a:gd name="csX0" fmla="*/ 0 w 3470223"/>
+              <a:gd name="csY0" fmla="*/ 0 h 3305331"/>
+              <a:gd name="csX1" fmla="*/ 509666 w 3470223"/>
+              <a:gd name="csY1" fmla="*/ 1296649 h 3305331"/>
+              <a:gd name="csX2" fmla="*/ 764499 w 3470223"/>
+              <a:gd name="csY2" fmla="*/ 2031167 h 3305331"/>
+              <a:gd name="csX3" fmla="*/ 944380 w 3470223"/>
+              <a:gd name="csY3" fmla="*/ 3305331 h 3305331"/>
+              <a:gd name="csX4" fmla="*/ 3470223 w 3470223"/>
+              <a:gd name="csY4" fmla="*/ 3297836 h 3305331"/>
+              <a:gd name="csX5" fmla="*/ 3455233 w 3470223"/>
+              <a:gd name="csY5" fmla="*/ 7495 h 3305331"/>
+              <a:gd name="csX6" fmla="*/ 0 w 3470223"/>
+              <a:gd name="csY6" fmla="*/ 0 h 3305331"/>
+              <a:gd name="csX0" fmla="*/ 0 w 3470223"/>
+              <a:gd name="csY0" fmla="*/ 0 h 3305331"/>
+              <a:gd name="csX1" fmla="*/ 509666 w 3470223"/>
+              <a:gd name="csY1" fmla="*/ 1296649 h 3305331"/>
+              <a:gd name="csX2" fmla="*/ 944380 w 3470223"/>
+              <a:gd name="csY2" fmla="*/ 3305331 h 3305331"/>
+              <a:gd name="csX3" fmla="*/ 3470223 w 3470223"/>
+              <a:gd name="csY3" fmla="*/ 3297836 h 3305331"/>
+              <a:gd name="csX4" fmla="*/ 3455233 w 3470223"/>
+              <a:gd name="csY4" fmla="*/ 7495 h 3305331"/>
+              <a:gd name="csX5" fmla="*/ 0 w 3470223"/>
+              <a:gd name="csY5" fmla="*/ 0 h 3305331"/>
+              <a:gd name="csX0" fmla="*/ 0 w 3470223"/>
+              <a:gd name="csY0" fmla="*/ 0 h 3305331"/>
+              <a:gd name="csX1" fmla="*/ 509666 w 3470223"/>
+              <a:gd name="csY1" fmla="*/ 1296649 h 3305331"/>
+              <a:gd name="csX2" fmla="*/ 944380 w 3470223"/>
+              <a:gd name="csY2" fmla="*/ 3305331 h 3305331"/>
+              <a:gd name="csX3" fmla="*/ 3470223 w 3470223"/>
+              <a:gd name="csY3" fmla="*/ 3297836 h 3305331"/>
+              <a:gd name="csX4" fmla="*/ 3455233 w 3470223"/>
+              <a:gd name="csY4" fmla="*/ 7495 h 3305331"/>
+              <a:gd name="csX5" fmla="*/ 0 w 3470223"/>
+              <a:gd name="csY5" fmla="*/ 0 h 3305331"/>
+            </a:gdLst>
+            <a:ahLst/>
+            <a:cxnLst>
+              <a:cxn ang="0">
+                <a:pos x="csX0" y="csY0"/>
+              </a:cxn>
+              <a:cxn ang="0">
+                <a:pos x="csX1" y="csY1"/>
+              </a:cxn>
+              <a:cxn ang="0">
+                <a:pos x="csX2" y="csY2"/>
+              </a:cxn>
+              <a:cxn ang="0">
+                <a:pos x="csX3" y="csY3"/>
+              </a:cxn>
+              <a:cxn ang="0">
+                <a:pos x="csX4" y="csY4"/>
+              </a:cxn>
+              <a:cxn ang="0">
+                <a:pos x="csX5" y="csY5"/>
+              </a:cxn>
+            </a:cxnLst>
+            <a:rect l="l" t="t" r="r" b="b"/>
+            <a:pathLst>
+              <a:path w="3470223" h="3305331">
+                <a:moveTo>
+                  <a:pt x="0" y="0"/>
+                </a:moveTo>
+                <a:cubicBezTo>
+                  <a:pt x="513413" y="357266"/>
+                  <a:pt x="352269" y="745760"/>
+                  <a:pt x="509666" y="1296649"/>
+                </a:cubicBezTo>
+                <a:cubicBezTo>
+                  <a:pt x="667063" y="1847538"/>
+                  <a:pt x="1320383" y="2192312"/>
+                  <a:pt x="944380" y="3305331"/>
+                </a:cubicBezTo>
+                <a:lnTo>
+                  <a:pt x="3470223" y="3297836"/>
+                </a:lnTo>
+                <a:cubicBezTo>
+                  <a:pt x="3465226" y="2201056"/>
+                  <a:pt x="3460230" y="1104275"/>
+                  <a:pt x="3455233" y="7495"/>
+                </a:cubicBezTo>
+                <a:lnTo>
+                  <a:pt x="0" y="0"/>
+                </a:lnTo>
+                <a:close/>
+              </a:path>
+            </a:pathLst>
+          </a:custGeom>
+          <a:solidFill>
+            <a:srgbClr val="EC7E3A"/>
+          </a:solidFill>
+          <a:ln>
+            <a:noFill/>
+          </a:ln>
+        </p:spPr>
+        <p:style>
+          <a:lnRef idx="2">
+            <a:schemeClr val="accent1">
+              <a:shade val="15000"/>
+            </a:schemeClr>
+          </a:lnRef>
+          <a:fillRef idx="1">
+            <a:schemeClr val="accent1"/>
+          </a:fillRef>
+          <a:effectRef idx="0">
+            <a:schemeClr val="accent1"/>
+          </a:effectRef>
+          <a:fontRef idx="minor">
+            <a:schemeClr val="lt1"/>
+          </a:fontRef>
+        </p:style>
+        <p:txBody>
+          <a:bodyPr rtlCol="0" anchor="ctr"/>
+          <a:lstStyle/>
+          <a:p>
+            <a:pPr algn="ctr"/>
+            <a:endParaRPr lang="en-US"/>
+          </a:p>
+        </p:txBody>
+      </p:sp>
+      <p:sp>
+        <p:nvSpPr>
+          <p:cNvPr id="49" name="Freeform 48">
+            <a:extLst>
+              <a:ext uri="{FF2B5EF4-FFF2-40B4-BE49-F238E27FC236}">
+                <a16:creationId xmlns:a16="http://schemas.microsoft.com/office/drawing/2014/main" id="{8EB9ADE4-A37B-F445-D44A-8163CF3C8032}"/>
+              </a:ext>
+            </a:extLst>
+          </p:cNvPr>
+          <p:cNvSpPr/>
+          <p:nvPr/>
+        </p:nvSpPr>
+        <p:spPr>
+          <a:xfrm rot="10800000">
+            <a:off x="-7371" y="-2059"/>
+            <a:ext cx="968592" cy="3749676"/>
+          </a:xfrm>
+          <a:custGeom>
+            <a:avLst/>
+            <a:gdLst>
+              <a:gd name="csX0" fmla="*/ 0 w 3470223"/>
+              <a:gd name="csY0" fmla="*/ 0 h 3305331"/>
+              <a:gd name="csX1" fmla="*/ 509666 w 3470223"/>
+              <a:gd name="csY1" fmla="*/ 1296649 h 3305331"/>
+              <a:gd name="csX2" fmla="*/ 816964 w 3470223"/>
+              <a:gd name="csY2" fmla="*/ 2226039 h 3305331"/>
+              <a:gd name="csX3" fmla="*/ 899410 w 3470223"/>
+              <a:gd name="csY3" fmla="*/ 2840636 h 3305331"/>
+              <a:gd name="csX4" fmla="*/ 944380 w 3470223"/>
+              <a:gd name="csY4" fmla="*/ 3305331 h 3305331"/>
+              <a:gd name="csX5" fmla="*/ 3470223 w 3470223"/>
+              <a:gd name="csY5" fmla="*/ 3297836 h 3305331"/>
+              <a:gd name="csX6" fmla="*/ 3455233 w 3470223"/>
+              <a:gd name="csY6" fmla="*/ 7495 h 3305331"/>
+              <a:gd name="csX7" fmla="*/ 0 w 3470223"/>
+              <a:gd name="csY7" fmla="*/ 0 h 3305331"/>
+              <a:gd name="csX0" fmla="*/ 149418 w 3619641"/>
+              <a:gd name="csY0" fmla="*/ 0 h 3305331"/>
+              <a:gd name="csX1" fmla="*/ 659084 w 3619641"/>
+              <a:gd name="csY1" fmla="*/ 1296649 h 3305331"/>
+              <a:gd name="csX2" fmla="*/ 966382 w 3619641"/>
+              <a:gd name="csY2" fmla="*/ 2226039 h 3305331"/>
+              <a:gd name="csX3" fmla="*/ 1048828 w 3619641"/>
+              <a:gd name="csY3" fmla="*/ 2840636 h 3305331"/>
+              <a:gd name="csX4" fmla="*/ 1093798 w 3619641"/>
+              <a:gd name="csY4" fmla="*/ 3305331 h 3305331"/>
+              <a:gd name="csX5" fmla="*/ 3619641 w 3619641"/>
+              <a:gd name="csY5" fmla="*/ 3297836 h 3305331"/>
+              <a:gd name="csX6" fmla="*/ 3604651 w 3619641"/>
+              <a:gd name="csY6" fmla="*/ 7495 h 3305331"/>
+              <a:gd name="csX7" fmla="*/ 149418 w 3619641"/>
+              <a:gd name="csY7" fmla="*/ 0 h 3305331"/>
+              <a:gd name="csX0" fmla="*/ 149418 w 3619641"/>
+              <a:gd name="csY0" fmla="*/ 0 h 3305331"/>
+              <a:gd name="csX1" fmla="*/ 659084 w 3619641"/>
+              <a:gd name="csY1" fmla="*/ 1296649 h 3305331"/>
+              <a:gd name="csX2" fmla="*/ 966382 w 3619641"/>
+              <a:gd name="csY2" fmla="*/ 2226039 h 3305331"/>
+              <a:gd name="csX3" fmla="*/ 1048828 w 3619641"/>
+              <a:gd name="csY3" fmla="*/ 2840636 h 3305331"/>
+              <a:gd name="csX4" fmla="*/ 1093798 w 3619641"/>
+              <a:gd name="csY4" fmla="*/ 3305331 h 3305331"/>
+              <a:gd name="csX5" fmla="*/ 3619641 w 3619641"/>
+              <a:gd name="csY5" fmla="*/ 3297836 h 3305331"/>
+              <a:gd name="csX6" fmla="*/ 3604651 w 3619641"/>
+              <a:gd name="csY6" fmla="*/ 7495 h 3305331"/>
+              <a:gd name="csX7" fmla="*/ 149418 w 3619641"/>
+              <a:gd name="csY7" fmla="*/ 0 h 3305331"/>
+              <a:gd name="csX0" fmla="*/ 149418 w 3619641"/>
+              <a:gd name="csY0" fmla="*/ 0 h 3305331"/>
+              <a:gd name="csX1" fmla="*/ 659084 w 3619641"/>
+              <a:gd name="csY1" fmla="*/ 1296649 h 3305331"/>
+              <a:gd name="csX2" fmla="*/ 966382 w 3619641"/>
+              <a:gd name="csY2" fmla="*/ 2226039 h 3305331"/>
+              <a:gd name="csX3" fmla="*/ 1048828 w 3619641"/>
+              <a:gd name="csY3" fmla="*/ 2840636 h 3305331"/>
+              <a:gd name="csX4" fmla="*/ 1093798 w 3619641"/>
+              <a:gd name="csY4" fmla="*/ 3305331 h 3305331"/>
+              <a:gd name="csX5" fmla="*/ 3619641 w 3619641"/>
+              <a:gd name="csY5" fmla="*/ 3297836 h 3305331"/>
+              <a:gd name="csX6" fmla="*/ 3604651 w 3619641"/>
+              <a:gd name="csY6" fmla="*/ 7495 h 3305331"/>
+              <a:gd name="csX7" fmla="*/ 149418 w 3619641"/>
+              <a:gd name="csY7" fmla="*/ 0 h 3305331"/>
+              <a:gd name="csX0" fmla="*/ 149418 w 3619641"/>
+              <a:gd name="csY0" fmla="*/ 0 h 3305331"/>
+              <a:gd name="csX1" fmla="*/ 659084 w 3619641"/>
+              <a:gd name="csY1" fmla="*/ 1296649 h 3305331"/>
+              <a:gd name="csX2" fmla="*/ 966382 w 3619641"/>
+              <a:gd name="csY2" fmla="*/ 2226039 h 3305331"/>
+              <a:gd name="csX3" fmla="*/ 1048828 w 3619641"/>
+              <a:gd name="csY3" fmla="*/ 2840636 h 3305331"/>
+              <a:gd name="csX4" fmla="*/ 1093798 w 3619641"/>
+              <a:gd name="csY4" fmla="*/ 3305331 h 3305331"/>
+              <a:gd name="csX5" fmla="*/ 3619641 w 3619641"/>
+              <a:gd name="csY5" fmla="*/ 3297836 h 3305331"/>
+              <a:gd name="csX6" fmla="*/ 3604651 w 3619641"/>
+              <a:gd name="csY6" fmla="*/ 7495 h 3305331"/>
+              <a:gd name="csX7" fmla="*/ 149418 w 3619641"/>
+              <a:gd name="csY7" fmla="*/ 0 h 3305331"/>
+              <a:gd name="csX0" fmla="*/ 149418 w 3619641"/>
+              <a:gd name="csY0" fmla="*/ 0 h 3305331"/>
+              <a:gd name="csX1" fmla="*/ 659084 w 3619641"/>
+              <a:gd name="csY1" fmla="*/ 1296649 h 3305331"/>
+              <a:gd name="csX2" fmla="*/ 966382 w 3619641"/>
+              <a:gd name="csY2" fmla="*/ 2226039 h 3305331"/>
+              <a:gd name="csX3" fmla="*/ 1048828 w 3619641"/>
+              <a:gd name="csY3" fmla="*/ 2840636 h 3305331"/>
+              <a:gd name="csX4" fmla="*/ 1093798 w 3619641"/>
+              <a:gd name="csY4" fmla="*/ 3305331 h 3305331"/>
+              <a:gd name="csX5" fmla="*/ 3619641 w 3619641"/>
+              <a:gd name="csY5" fmla="*/ 3297836 h 3305331"/>
+              <a:gd name="csX6" fmla="*/ 3604651 w 3619641"/>
+              <a:gd name="csY6" fmla="*/ 7495 h 3305331"/>
+              <a:gd name="csX7" fmla="*/ 149418 w 3619641"/>
+              <a:gd name="csY7" fmla="*/ 0 h 3305331"/>
+              <a:gd name="csX0" fmla="*/ 0 w 3470223"/>
+              <a:gd name="csY0" fmla="*/ 0 h 3305331"/>
+              <a:gd name="csX1" fmla="*/ 509666 w 3470223"/>
+              <a:gd name="csY1" fmla="*/ 1296649 h 3305331"/>
+              <a:gd name="csX2" fmla="*/ 816964 w 3470223"/>
+              <a:gd name="csY2" fmla="*/ 2226039 h 3305331"/>
+              <a:gd name="csX3" fmla="*/ 899410 w 3470223"/>
+              <a:gd name="csY3" fmla="*/ 2840636 h 3305331"/>
+              <a:gd name="csX4" fmla="*/ 944380 w 3470223"/>
+              <a:gd name="csY4" fmla="*/ 3305331 h 3305331"/>
+              <a:gd name="csX5" fmla="*/ 3470223 w 3470223"/>
+              <a:gd name="csY5" fmla="*/ 3297836 h 3305331"/>
+              <a:gd name="csX6" fmla="*/ 3455233 w 3470223"/>
+              <a:gd name="csY6" fmla="*/ 7495 h 3305331"/>
+              <a:gd name="csX7" fmla="*/ 0 w 3470223"/>
+              <a:gd name="csY7" fmla="*/ 0 h 3305331"/>
+              <a:gd name="csX0" fmla="*/ 0 w 3470223"/>
+              <a:gd name="csY0" fmla="*/ 0 h 3305331"/>
+              <a:gd name="csX1" fmla="*/ 509666 w 3470223"/>
+              <a:gd name="csY1" fmla="*/ 1296649 h 3305331"/>
+              <a:gd name="csX2" fmla="*/ 764499 w 3470223"/>
+              <a:gd name="csY2" fmla="*/ 2031167 h 3305331"/>
+              <a:gd name="csX3" fmla="*/ 899410 w 3470223"/>
+              <a:gd name="csY3" fmla="*/ 2840636 h 3305331"/>
+              <a:gd name="csX4" fmla="*/ 944380 w 3470223"/>
+              <a:gd name="csY4" fmla="*/ 3305331 h 3305331"/>
+              <a:gd name="csX5" fmla="*/ 3470223 w 3470223"/>
+              <a:gd name="csY5" fmla="*/ 3297836 h 3305331"/>
+              <a:gd name="csX6" fmla="*/ 3455233 w 3470223"/>
+              <a:gd name="csY6" fmla="*/ 7495 h 3305331"/>
+              <a:gd name="csX7" fmla="*/ 0 w 3470223"/>
+              <a:gd name="csY7" fmla="*/ 0 h 3305331"/>
+              <a:gd name="csX0" fmla="*/ 0 w 3470223"/>
+              <a:gd name="csY0" fmla="*/ 0 h 3305331"/>
+              <a:gd name="csX1" fmla="*/ 509666 w 3470223"/>
+              <a:gd name="csY1" fmla="*/ 1296649 h 3305331"/>
+              <a:gd name="csX2" fmla="*/ 764499 w 3470223"/>
+              <a:gd name="csY2" fmla="*/ 2031167 h 3305331"/>
+              <a:gd name="csX3" fmla="*/ 899410 w 3470223"/>
+              <a:gd name="csY3" fmla="*/ 2840636 h 3305331"/>
+              <a:gd name="csX4" fmla="*/ 944380 w 3470223"/>
+              <a:gd name="csY4" fmla="*/ 3305331 h 3305331"/>
+              <a:gd name="csX5" fmla="*/ 3470223 w 3470223"/>
+              <a:gd name="csY5" fmla="*/ 3297836 h 3305331"/>
+              <a:gd name="csX6" fmla="*/ 3455233 w 3470223"/>
+              <a:gd name="csY6" fmla="*/ 7495 h 3305331"/>
+              <a:gd name="csX7" fmla="*/ 0 w 3470223"/>
+              <a:gd name="csY7" fmla="*/ 0 h 3305331"/>
+              <a:gd name="csX0" fmla="*/ 0 w 3470223"/>
+              <a:gd name="csY0" fmla="*/ 0 h 3305331"/>
+              <a:gd name="csX1" fmla="*/ 509666 w 3470223"/>
+              <a:gd name="csY1" fmla="*/ 1296649 h 3305331"/>
+              <a:gd name="csX2" fmla="*/ 764499 w 3470223"/>
+              <a:gd name="csY2" fmla="*/ 2031167 h 3305331"/>
+              <a:gd name="csX3" fmla="*/ 899410 w 3470223"/>
+              <a:gd name="csY3" fmla="*/ 2840636 h 3305331"/>
+              <a:gd name="csX4" fmla="*/ 944380 w 3470223"/>
+              <a:gd name="csY4" fmla="*/ 3305331 h 3305331"/>
+              <a:gd name="csX5" fmla="*/ 3470223 w 3470223"/>
+              <a:gd name="csY5" fmla="*/ 3297836 h 3305331"/>
+              <a:gd name="csX6" fmla="*/ 3455233 w 3470223"/>
+              <a:gd name="csY6" fmla="*/ 7495 h 3305331"/>
+              <a:gd name="csX7" fmla="*/ 0 w 3470223"/>
+              <a:gd name="csY7" fmla="*/ 0 h 3305331"/>
+              <a:gd name="csX0" fmla="*/ 0 w 3470223"/>
+              <a:gd name="csY0" fmla="*/ 0 h 3305331"/>
+              <a:gd name="csX1" fmla="*/ 509666 w 3470223"/>
+              <a:gd name="csY1" fmla="*/ 1296649 h 3305331"/>
+              <a:gd name="csX2" fmla="*/ 764499 w 3470223"/>
+              <a:gd name="csY2" fmla="*/ 2031167 h 3305331"/>
+              <a:gd name="csX3" fmla="*/ 944380 w 3470223"/>
+              <a:gd name="csY3" fmla="*/ 3305331 h 3305331"/>
+              <a:gd name="csX4" fmla="*/ 3470223 w 3470223"/>
+              <a:gd name="csY4" fmla="*/ 3297836 h 3305331"/>
+              <a:gd name="csX5" fmla="*/ 3455233 w 3470223"/>
+              <a:gd name="csY5" fmla="*/ 7495 h 3305331"/>
+              <a:gd name="csX6" fmla="*/ 0 w 3470223"/>
+              <a:gd name="csY6" fmla="*/ 0 h 3305331"/>
+              <a:gd name="csX0" fmla="*/ 0 w 3470223"/>
+              <a:gd name="csY0" fmla="*/ 0 h 3305331"/>
+              <a:gd name="csX1" fmla="*/ 509666 w 3470223"/>
+              <a:gd name="csY1" fmla="*/ 1296649 h 3305331"/>
+              <a:gd name="csX2" fmla="*/ 764499 w 3470223"/>
+              <a:gd name="csY2" fmla="*/ 2031167 h 3305331"/>
+              <a:gd name="csX3" fmla="*/ 944380 w 3470223"/>
+              <a:gd name="csY3" fmla="*/ 3305331 h 3305331"/>
+              <a:gd name="csX4" fmla="*/ 3470223 w 3470223"/>
+              <a:gd name="csY4" fmla="*/ 3297836 h 3305331"/>
+              <a:gd name="csX5" fmla="*/ 3455233 w 3470223"/>
+              <a:gd name="csY5" fmla="*/ 7495 h 3305331"/>
+              <a:gd name="csX6" fmla="*/ 0 w 3470223"/>
+              <a:gd name="csY6" fmla="*/ 0 h 3305331"/>
+              <a:gd name="csX0" fmla="*/ 0 w 3470223"/>
+              <a:gd name="csY0" fmla="*/ 0 h 3305331"/>
+              <a:gd name="csX1" fmla="*/ 509666 w 3470223"/>
+              <a:gd name="csY1" fmla="*/ 1296649 h 3305331"/>
+              <a:gd name="csX2" fmla="*/ 764499 w 3470223"/>
+              <a:gd name="csY2" fmla="*/ 2031167 h 3305331"/>
+              <a:gd name="csX3" fmla="*/ 944380 w 3470223"/>
+              <a:gd name="csY3" fmla="*/ 3305331 h 3305331"/>
+              <a:gd name="csX4" fmla="*/ 3470223 w 3470223"/>
+              <a:gd name="csY4" fmla="*/ 3297836 h 3305331"/>
+              <a:gd name="csX5" fmla="*/ 3455233 w 3470223"/>
+              <a:gd name="csY5" fmla="*/ 7495 h 3305331"/>
+              <a:gd name="csX6" fmla="*/ 0 w 3470223"/>
+              <a:gd name="csY6" fmla="*/ 0 h 3305331"/>
+              <a:gd name="csX0" fmla="*/ 0 w 3470223"/>
+              <a:gd name="csY0" fmla="*/ 0 h 3305331"/>
+              <a:gd name="csX1" fmla="*/ 509666 w 3470223"/>
+              <a:gd name="csY1" fmla="*/ 1296649 h 3305331"/>
+              <a:gd name="csX2" fmla="*/ 764499 w 3470223"/>
+              <a:gd name="csY2" fmla="*/ 2031167 h 3305331"/>
+              <a:gd name="csX3" fmla="*/ 944380 w 3470223"/>
+              <a:gd name="csY3" fmla="*/ 3305331 h 3305331"/>
+              <a:gd name="csX4" fmla="*/ 3470223 w 3470223"/>
+              <a:gd name="csY4" fmla="*/ 3297836 h 3305331"/>
+              <a:gd name="csX5" fmla="*/ 3455233 w 3470223"/>
+              <a:gd name="csY5" fmla="*/ 7495 h 3305331"/>
+              <a:gd name="csX6" fmla="*/ 0 w 3470223"/>
+              <a:gd name="csY6" fmla="*/ 0 h 3305331"/>
+              <a:gd name="csX0" fmla="*/ 0 w 3470223"/>
+              <a:gd name="csY0" fmla="*/ 0 h 3305331"/>
+              <a:gd name="csX1" fmla="*/ 509666 w 3470223"/>
+              <a:gd name="csY1" fmla="*/ 1296649 h 3305331"/>
+              <a:gd name="csX2" fmla="*/ 764499 w 3470223"/>
+              <a:gd name="csY2" fmla="*/ 2031167 h 3305331"/>
+              <a:gd name="csX3" fmla="*/ 944380 w 3470223"/>
+              <a:gd name="csY3" fmla="*/ 3305331 h 3305331"/>
+              <a:gd name="csX4" fmla="*/ 3470223 w 3470223"/>
+              <a:gd name="csY4" fmla="*/ 3297836 h 3305331"/>
+              <a:gd name="csX5" fmla="*/ 3455233 w 3470223"/>
+              <a:gd name="csY5" fmla="*/ 7495 h 3305331"/>
+              <a:gd name="csX6" fmla="*/ 0 w 3470223"/>
+              <a:gd name="csY6" fmla="*/ 0 h 3305331"/>
+              <a:gd name="csX0" fmla="*/ 0 w 3470223"/>
+              <a:gd name="csY0" fmla="*/ 0 h 3305331"/>
+              <a:gd name="csX1" fmla="*/ 509666 w 3470223"/>
+              <a:gd name="csY1" fmla="*/ 1296649 h 3305331"/>
+              <a:gd name="csX2" fmla="*/ 944380 w 3470223"/>
+              <a:gd name="csY2" fmla="*/ 3305331 h 3305331"/>
+              <a:gd name="csX3" fmla="*/ 3470223 w 3470223"/>
+              <a:gd name="csY3" fmla="*/ 3297836 h 3305331"/>
+              <a:gd name="csX4" fmla="*/ 3455233 w 3470223"/>
+              <a:gd name="csY4" fmla="*/ 7495 h 3305331"/>
+              <a:gd name="csX5" fmla="*/ 0 w 3470223"/>
+              <a:gd name="csY5" fmla="*/ 0 h 3305331"/>
+              <a:gd name="csX0" fmla="*/ 0 w 3470223"/>
+              <a:gd name="csY0" fmla="*/ 0 h 3305331"/>
+              <a:gd name="csX1" fmla="*/ 509666 w 3470223"/>
+              <a:gd name="csY1" fmla="*/ 1296649 h 3305331"/>
+              <a:gd name="csX2" fmla="*/ 944380 w 3470223"/>
+              <a:gd name="csY2" fmla="*/ 3305331 h 3305331"/>
+              <a:gd name="csX3" fmla="*/ 3470223 w 3470223"/>
+              <a:gd name="csY3" fmla="*/ 3297836 h 3305331"/>
+              <a:gd name="csX4" fmla="*/ 3455233 w 3470223"/>
+              <a:gd name="csY4" fmla="*/ 7495 h 3305331"/>
+              <a:gd name="csX5" fmla="*/ 0 w 3470223"/>
+              <a:gd name="csY5" fmla="*/ 0 h 3305331"/>
+            </a:gdLst>
+            <a:ahLst/>
+            <a:cxnLst>
+              <a:cxn ang="0">
+                <a:pos x="csX0" y="csY0"/>
+              </a:cxn>
+              <a:cxn ang="0">
+                <a:pos x="csX1" y="csY1"/>
+              </a:cxn>
+              <a:cxn ang="0">
+                <a:pos x="csX2" y="csY2"/>
+              </a:cxn>
+              <a:cxn ang="0">
+                <a:pos x="csX3" y="csY3"/>
+              </a:cxn>
+              <a:cxn ang="0">
+                <a:pos x="csX4" y="csY4"/>
+              </a:cxn>
+              <a:cxn ang="0">
+                <a:pos x="csX5" y="csY5"/>
+              </a:cxn>
+            </a:cxnLst>
+            <a:rect l="l" t="t" r="r" b="b"/>
+            <a:pathLst>
+              <a:path w="3470223" h="3305331">
+                <a:moveTo>
+                  <a:pt x="0" y="0"/>
+                </a:moveTo>
+                <a:cubicBezTo>
+                  <a:pt x="513413" y="357266"/>
+                  <a:pt x="352269" y="745760"/>
+                  <a:pt x="509666" y="1296649"/>
+                </a:cubicBezTo>
+                <a:cubicBezTo>
+                  <a:pt x="667063" y="1847538"/>
+                  <a:pt x="1320383" y="2192312"/>
+                  <a:pt x="944380" y="3305331"/>
+                </a:cubicBezTo>
+                <a:lnTo>
+                  <a:pt x="3470223" y="3297836"/>
+                </a:lnTo>
+                <a:cubicBezTo>
+                  <a:pt x="3465226" y="2201056"/>
+                  <a:pt x="3460230" y="1104275"/>
+                  <a:pt x="3455233" y="7495"/>
+                </a:cubicBezTo>
+                <a:lnTo>
+                  <a:pt x="0" y="0"/>
+                </a:lnTo>
+                <a:close/>
+              </a:path>
+            </a:pathLst>
+          </a:custGeom>
+          <a:solidFill>
+            <a:srgbClr val="8F8F8F"/>
+          </a:solidFill>
+          <a:ln>
+            <a:noFill/>
+          </a:ln>
+        </p:spPr>
+        <p:style>
+          <a:lnRef idx="2">
+            <a:schemeClr val="accent1">
+              <a:shade val="15000"/>
+            </a:schemeClr>
+          </a:lnRef>
+          <a:fillRef idx="1">
+            <a:schemeClr val="accent1"/>
+          </a:fillRef>
+          <a:effectRef idx="0">
+            <a:schemeClr val="accent1"/>
+          </a:effectRef>
+          <a:fontRef idx="minor">
+            <a:schemeClr val="lt1"/>
+          </a:fontRef>
+        </p:style>
+        <p:txBody>
+          <a:bodyPr rtlCol="0" anchor="ctr"/>
+          <a:lstStyle/>
+          <a:p>
+            <a:pPr algn="ctr"/>
+            <a:endParaRPr lang="en-US"/>
+          </a:p>
+        </p:txBody>
+      </p:sp>
+      <p:sp>
+        <p:nvSpPr>
+          <p:cNvPr id="53" name="Rectangle 52">
+            <a:extLst>
+              <a:ext uri="{FF2B5EF4-FFF2-40B4-BE49-F238E27FC236}">
+                <a16:creationId xmlns:a16="http://schemas.microsoft.com/office/drawing/2014/main" id="{F32A67CC-4EB9-F4CE-809F-40285AE29296}"/>
+              </a:ext>
+            </a:extLst>
+          </p:cNvPr>
+          <p:cNvSpPr/>
+          <p:nvPr/>
+        </p:nvSpPr>
+        <p:spPr>
+          <a:xfrm>
+            <a:off x="8288806" y="-2059"/>
+            <a:ext cx="405368" cy="3749675"/>
+          </a:xfrm>
+          <a:prstGeom prst="rect">
+            <a:avLst/>
+          </a:prstGeom>
+          <a:solidFill>
+            <a:schemeClr val="bg1"/>
+          </a:solidFill>
+          <a:ln>
+            <a:noFill/>
+          </a:ln>
+        </p:spPr>
+        <p:style>
+          <a:lnRef idx="2">
+            <a:schemeClr val="accent1">
+              <a:shade val="15000"/>
+            </a:schemeClr>
+          </a:lnRef>
+          <a:fillRef idx="1">
+            <a:schemeClr val="accent1"/>
+          </a:fillRef>
+          <a:effectRef idx="0">
+            <a:schemeClr val="accent1"/>
+          </a:effectRef>
+          <a:fontRef idx="minor">
+            <a:schemeClr val="lt1"/>
+          </a:fontRef>
+        </p:style>
+        <p:txBody>
+          <a:bodyPr rtlCol="0" anchor="ctr"/>
+          <a:lstStyle/>
+          <a:p>
+            <a:pPr algn="ctr"/>
+            <a:endParaRPr lang="en-US"/>
           </a:p>
         </p:txBody>
       </p:sp>
